--- a/Lecture slides/AMOS B02 - Scrum and AMOS.pptx
+++ b/Lecture slides/AMOS B02 - Scrum and AMOS.pptx
@@ -53,6 +53,7 @@
     <p:sldId id="297" r:id="rId49"/>
     <p:sldId id="298" r:id="rId50"/>
     <p:sldId id="299" r:id="rId51"/>
+    <p:sldId id="300" r:id="rId52"/>
   </p:sldIdLst>
   <p:sldSz cy="5143500" cx="9144000"/>
   <p:notesSz cx="6858000" cy="9144000"/>
@@ -3224,7 +3225,7 @@
       </p:grpSpPr>
       <p:sp>
         <p:nvSpPr>
-          <p:cNvPr id="320" name="Google Shape;320;g22c6355d619_0_75:notes"/>
+          <p:cNvPr id="320" name="Google Shape;320;g3e56bd7a841_0_0:notes"/>
           <p:cNvSpPr/>
           <p:nvPr>
             <p:ph idx="2" type="sldImg"/>
@@ -3259,7 +3260,7 @@
       </p:sp>
       <p:sp>
         <p:nvSpPr>
-          <p:cNvPr id="321" name="Google Shape;321;g22c6355d619_0_75:notes"/>
+          <p:cNvPr id="321" name="Google Shape;321;g3e56bd7a841_0_0:notes"/>
           <p:cNvSpPr txBox="1"/>
           <p:nvPr>
             <p:ph idx="1" type="body"/>
@@ -3309,7 +3310,7 @@
   <p:cSld>
     <p:spTree>
       <p:nvGrpSpPr>
-        <p:cNvPr id="324" name="Shape 324"/>
+        <p:cNvPr id="326" name="Shape 326"/>
         <p:cNvGrpSpPr/>
         <p:nvPr/>
       </p:nvGrpSpPr>
@@ -3323,7 +3324,7 @@
       </p:grpSpPr>
       <p:sp>
         <p:nvSpPr>
-          <p:cNvPr id="325" name="Google Shape;325;g22c6355d619_0_238:notes"/>
+          <p:cNvPr id="327" name="Google Shape;327;g22c6355d619_0_75:notes"/>
           <p:cNvSpPr/>
           <p:nvPr>
             <p:ph idx="2" type="sldImg"/>
@@ -3358,7 +3359,7 @@
       </p:sp>
       <p:sp>
         <p:nvSpPr>
-          <p:cNvPr id="326" name="Google Shape;326;g22c6355d619_0_238:notes"/>
+          <p:cNvPr id="328" name="Google Shape;328;g22c6355d619_0_75:notes"/>
           <p:cNvSpPr txBox="1"/>
           <p:nvPr>
             <p:ph idx="1" type="body"/>
@@ -3408,7 +3409,7 @@
   <p:cSld>
     <p:spTree>
       <p:nvGrpSpPr>
-        <p:cNvPr id="332" name="Shape 332"/>
+        <p:cNvPr id="331" name="Shape 331"/>
         <p:cNvGrpSpPr/>
         <p:nvPr/>
       </p:nvGrpSpPr>
@@ -3422,7 +3423,7 @@
       </p:grpSpPr>
       <p:sp>
         <p:nvSpPr>
-          <p:cNvPr id="333" name="Google Shape;333;g152a3f74d0d_0_63:notes"/>
+          <p:cNvPr id="332" name="Google Shape;332;g22c6355d619_0_238:notes"/>
           <p:cNvSpPr/>
           <p:nvPr>
             <p:ph idx="2" type="sldImg"/>
@@ -3457,7 +3458,7 @@
       </p:sp>
       <p:sp>
         <p:nvSpPr>
-          <p:cNvPr id="334" name="Google Shape;334;g152a3f74d0d_0_63:notes"/>
+          <p:cNvPr id="333" name="Google Shape;333;g22c6355d619_0_238:notes"/>
           <p:cNvSpPr txBox="1"/>
           <p:nvPr>
             <p:ph idx="1" type="body"/>
@@ -3507,7 +3508,7 @@
   <p:cSld>
     <p:spTree>
       <p:nvGrpSpPr>
-        <p:cNvPr id="340" name="Shape 340"/>
+        <p:cNvPr id="339" name="Shape 339"/>
         <p:cNvGrpSpPr/>
         <p:nvPr/>
       </p:nvGrpSpPr>
@@ -3521,7 +3522,7 @@
       </p:grpSpPr>
       <p:sp>
         <p:nvSpPr>
-          <p:cNvPr id="341" name="Google Shape;341;g22c6355d619_0_244:notes"/>
+          <p:cNvPr id="340" name="Google Shape;340;g152a3f74d0d_0_63:notes"/>
           <p:cNvSpPr/>
           <p:nvPr>
             <p:ph idx="2" type="sldImg"/>
@@ -3556,7 +3557,7 @@
       </p:sp>
       <p:sp>
         <p:nvSpPr>
-          <p:cNvPr id="342" name="Google Shape;342;g22c6355d619_0_244:notes"/>
+          <p:cNvPr id="341" name="Google Shape;341;g152a3f74d0d_0_63:notes"/>
           <p:cNvSpPr txBox="1"/>
           <p:nvPr>
             <p:ph idx="1" type="body"/>
@@ -3620,7 +3621,7 @@
       </p:grpSpPr>
       <p:sp>
         <p:nvSpPr>
-          <p:cNvPr id="348" name="Google Shape;348;g152a3f74d0d_0_28:notes"/>
+          <p:cNvPr id="348" name="Google Shape;348;g22c6355d619_0_244:notes"/>
           <p:cNvSpPr/>
           <p:nvPr>
             <p:ph idx="2" type="sldImg"/>
@@ -3655,7 +3656,7 @@
       </p:sp>
       <p:sp>
         <p:nvSpPr>
-          <p:cNvPr id="349" name="Google Shape;349;g152a3f74d0d_0_28:notes"/>
+          <p:cNvPr id="349" name="Google Shape;349;g22c6355d619_0_244:notes"/>
           <p:cNvSpPr txBox="1"/>
           <p:nvPr>
             <p:ph idx="1" type="body"/>
@@ -3705,7 +3706,7 @@
   <p:cSld>
     <p:spTree>
       <p:nvGrpSpPr>
-        <p:cNvPr id="352" name="Shape 352"/>
+        <p:cNvPr id="354" name="Shape 354"/>
         <p:cNvGrpSpPr/>
         <p:nvPr/>
       </p:nvGrpSpPr>
@@ -3719,7 +3720,7 @@
       </p:grpSpPr>
       <p:sp>
         <p:nvSpPr>
-          <p:cNvPr id="353" name="Google Shape;353;g22c6355d619_0_0:notes"/>
+          <p:cNvPr id="355" name="Google Shape;355;g152a3f74d0d_0_28:notes"/>
           <p:cNvSpPr/>
           <p:nvPr>
             <p:ph idx="2" type="sldImg"/>
@@ -3754,7 +3755,7 @@
       </p:sp>
       <p:sp>
         <p:nvSpPr>
-          <p:cNvPr id="354" name="Google Shape;354;g22c6355d619_0_0:notes"/>
+          <p:cNvPr id="356" name="Google Shape;356;g152a3f74d0d_0_28:notes"/>
           <p:cNvSpPr txBox="1"/>
           <p:nvPr>
             <p:ph idx="1" type="body"/>
@@ -3818,7 +3819,7 @@
       </p:grpSpPr>
       <p:sp>
         <p:nvSpPr>
-          <p:cNvPr id="360" name="Google Shape;360;g31390bb5a5a_0_9:notes"/>
+          <p:cNvPr id="360" name="Google Shape;360;g22c6355d619_0_0:notes"/>
           <p:cNvSpPr/>
           <p:nvPr>
             <p:ph idx="2" type="sldImg"/>
@@ -3853,7 +3854,7 @@
       </p:sp>
       <p:sp>
         <p:nvSpPr>
-          <p:cNvPr id="361" name="Google Shape;361;g31390bb5a5a_0_9:notes"/>
+          <p:cNvPr id="361" name="Google Shape;361;g22c6355d619_0_0:notes"/>
           <p:cNvSpPr txBox="1"/>
           <p:nvPr>
             <p:ph idx="1" type="body"/>
@@ -3917,7 +3918,7 @@
       </p:grpSpPr>
       <p:sp>
         <p:nvSpPr>
-          <p:cNvPr id="367" name="Google Shape;367;g31390bb5a5a_0_15:notes"/>
+          <p:cNvPr id="367" name="Google Shape;367;g31390bb5a5a_0_9:notes"/>
           <p:cNvSpPr/>
           <p:nvPr>
             <p:ph idx="2" type="sldImg"/>
@@ -3952,7 +3953,7 @@
       </p:sp>
       <p:sp>
         <p:nvSpPr>
-          <p:cNvPr id="368" name="Google Shape;368;g31390bb5a5a_0_15:notes"/>
+          <p:cNvPr id="368" name="Google Shape;368;g31390bb5a5a_0_9:notes"/>
           <p:cNvSpPr txBox="1"/>
           <p:nvPr>
             <p:ph idx="1" type="body"/>
@@ -4115,7 +4116,7 @@
       </p:grpSpPr>
       <p:sp>
         <p:nvSpPr>
-          <p:cNvPr id="374" name="Google Shape;374;g31390bb5a5a_0_21:notes"/>
+          <p:cNvPr id="374" name="Google Shape;374;g31390bb5a5a_0_15:notes"/>
           <p:cNvSpPr/>
           <p:nvPr>
             <p:ph idx="2" type="sldImg"/>
@@ -4150,7 +4151,7 @@
       </p:sp>
       <p:sp>
         <p:nvSpPr>
-          <p:cNvPr id="375" name="Google Shape;375;g31390bb5a5a_0_21:notes"/>
+          <p:cNvPr id="375" name="Google Shape;375;g31390bb5a5a_0_15:notes"/>
           <p:cNvSpPr txBox="1"/>
           <p:nvPr>
             <p:ph idx="1" type="body"/>
@@ -4214,7 +4215,7 @@
       </p:grpSpPr>
       <p:sp>
         <p:nvSpPr>
-          <p:cNvPr id="381" name="Google Shape;381;g152a3f74d0d_0_57:notes"/>
+          <p:cNvPr id="381" name="Google Shape;381;g31390bb5a5a_0_21:notes"/>
           <p:cNvSpPr/>
           <p:nvPr>
             <p:ph idx="2" type="sldImg"/>
@@ -4249,7 +4250,7 @@
       </p:sp>
       <p:sp>
         <p:nvSpPr>
-          <p:cNvPr id="382" name="Google Shape;382;g152a3f74d0d_0_57:notes"/>
+          <p:cNvPr id="382" name="Google Shape;382;g31390bb5a5a_0_21:notes"/>
           <p:cNvSpPr txBox="1"/>
           <p:nvPr>
             <p:ph idx="1" type="body"/>
@@ -4313,7 +4314,7 @@
       </p:grpSpPr>
       <p:sp>
         <p:nvSpPr>
-          <p:cNvPr id="388" name="Google Shape;388;g22d186861df_0_1:notes"/>
+          <p:cNvPr id="388" name="Google Shape;388;g152a3f74d0d_0_57:notes"/>
           <p:cNvSpPr/>
           <p:nvPr>
             <p:ph idx="2" type="sldImg"/>
@@ -4348,7 +4349,7 @@
       </p:sp>
       <p:sp>
         <p:nvSpPr>
-          <p:cNvPr id="389" name="Google Shape;389;g22d186861df_0_1:notes"/>
+          <p:cNvPr id="389" name="Google Shape;389;g152a3f74d0d_0_57:notes"/>
           <p:cNvSpPr txBox="1"/>
           <p:nvPr>
             <p:ph idx="1" type="body"/>
@@ -4412,7 +4413,7 @@
       </p:grpSpPr>
       <p:sp>
         <p:nvSpPr>
-          <p:cNvPr id="395" name="Google Shape;395;g2397cb0cd5f_0_38:notes"/>
+          <p:cNvPr id="395" name="Google Shape;395;g22d186861df_0_1:notes"/>
           <p:cNvSpPr/>
           <p:nvPr>
             <p:ph idx="2" type="sldImg"/>
@@ -4447,7 +4448,7 @@
       </p:sp>
       <p:sp>
         <p:nvSpPr>
-          <p:cNvPr id="396" name="Google Shape;396;g2397cb0cd5f_0_38:notes"/>
+          <p:cNvPr id="396" name="Google Shape;396;g22d186861df_0_1:notes"/>
           <p:cNvSpPr txBox="1"/>
           <p:nvPr>
             <p:ph idx="1" type="body"/>
@@ -4497,7 +4498,7 @@
   <p:cSld>
     <p:spTree>
       <p:nvGrpSpPr>
-        <p:cNvPr id="400" name="Shape 400"/>
+        <p:cNvPr id="401" name="Shape 401"/>
         <p:cNvGrpSpPr/>
         <p:nvPr/>
       </p:nvGrpSpPr>
@@ -4511,7 +4512,7 @@
       </p:grpSpPr>
       <p:sp>
         <p:nvSpPr>
-          <p:cNvPr id="401" name="Google Shape;401;g2397cb0cd5f_0_43:notes"/>
+          <p:cNvPr id="402" name="Google Shape;402;g2397cb0cd5f_0_38:notes"/>
           <p:cNvSpPr/>
           <p:nvPr>
             <p:ph idx="2" type="sldImg"/>
@@ -4546,7 +4547,106 @@
       </p:sp>
       <p:sp>
         <p:nvSpPr>
-          <p:cNvPr id="402" name="Google Shape;402;g2397cb0cd5f_0_43:notes"/>
+          <p:cNvPr id="403" name="Google Shape;403;g2397cb0cd5f_0_38:notes"/>
+          <p:cNvSpPr txBox="1"/>
+          <p:nvPr>
+            <p:ph idx="1" type="body"/>
+          </p:nvPr>
+        </p:nvSpPr>
+        <p:spPr>
+          <a:xfrm>
+            <a:off x="685800" y="4343400"/>
+            <a:ext cx="5486400" cy="4114800"/>
+          </a:xfrm>
+          <a:prstGeom prst="rect">
+            <a:avLst/>
+          </a:prstGeom>
+        </p:spPr>
+        <p:txBody>
+          <a:bodyPr anchorCtr="0" anchor="t" bIns="91425" lIns="91425" spcFirstLastPara="1" rIns="91425" wrap="square" tIns="91425">
+            <a:noAutofit/>
+          </a:bodyPr>
+          <a:lstStyle/>
+          <a:p>
+            <a:pPr indent="0" lvl="0" marL="0" rtl="0" algn="l">
+              <a:spcBef>
+                <a:spcPts val="0"/>
+              </a:spcBef>
+              <a:spcAft>
+                <a:spcPts val="0"/>
+              </a:spcAft>
+              <a:buNone/>
+            </a:pPr>
+            <a:r>
+              <a:t/>
+            </a:r>
+            <a:endParaRPr/>
+          </a:p>
+        </p:txBody>
+      </p:sp>
+    </p:spTree>
+  </p:cSld>
+  <p:clrMapOvr>
+    <a:masterClrMapping/>
+  </p:clrMapOvr>
+</p:notes>
+</file>
+
+<file path=ppt/notesSlides/notesSlide45.xml><?xml version="1.0" encoding="utf-8"?>
+<p:notes xmlns:a="http://schemas.openxmlformats.org/drawingml/2006/main" xmlns:r="http://schemas.openxmlformats.org/officeDocument/2006/relationships" xmlns:mc="http://schemas.openxmlformats.org/markup-compatibility/2006" xmlns:mv="urn:schemas-microsoft-com:mac:vml" xmlns:p="http://schemas.openxmlformats.org/presentationml/2006/main" xmlns:c="http://schemas.openxmlformats.org/drawingml/2006/chart" xmlns:dgm="http://schemas.openxmlformats.org/drawingml/2006/diagram" xmlns:o="urn:schemas-microsoft-com:office:office" xmlns:v="urn:schemas-microsoft-com:vml" xmlns:pvml="urn:schemas-microsoft-com:office:powerpoint" xmlns:com="http://schemas.openxmlformats.org/drawingml/2006/compatibility" xmlns:p14="http://schemas.microsoft.com/office/powerpoint/2010/main" xmlns:p15="http://schemas.microsoft.com/office/powerpoint/2012/main" xmlns:ahyp="http://schemas.microsoft.com/office/drawing/2018/hyperlinkcolor" showMasterPhAnim="0" showMasterSp="0">
+  <p:cSld>
+    <p:spTree>
+      <p:nvGrpSpPr>
+        <p:cNvPr id="407" name="Shape 407"/>
+        <p:cNvGrpSpPr/>
+        <p:nvPr/>
+      </p:nvGrpSpPr>
+      <p:grpSpPr>
+        <a:xfrm>
+          <a:off x="0" y="0"/>
+          <a:ext cx="0" cy="0"/>
+          <a:chOff x="0" y="0"/>
+          <a:chExt cx="0" cy="0"/>
+        </a:xfrm>
+      </p:grpSpPr>
+      <p:sp>
+        <p:nvSpPr>
+          <p:cNvPr id="408" name="Google Shape;408;g2397cb0cd5f_0_43:notes"/>
+          <p:cNvSpPr/>
+          <p:nvPr>
+            <p:ph idx="2" type="sldImg"/>
+          </p:nvPr>
+        </p:nvSpPr>
+        <p:spPr>
+          <a:xfrm>
+            <a:off x="381300" y="685800"/>
+            <a:ext cx="6096000" cy="3429000"/>
+          </a:xfrm>
+          <a:custGeom>
+            <a:rect b="b" l="l" r="r" t="t"/>
+            <a:pathLst>
+              <a:path extrusionOk="0" h="120000" w="120000">
+                <a:moveTo>
+                  <a:pt x="0" y="0"/>
+                </a:moveTo>
+                <a:lnTo>
+                  <a:pt x="120000" y="0"/>
+                </a:lnTo>
+                <a:lnTo>
+                  <a:pt x="120000" y="120000"/>
+                </a:lnTo>
+                <a:lnTo>
+                  <a:pt x="0" y="120000"/>
+                </a:lnTo>
+                <a:close/>
+              </a:path>
+            </a:pathLst>
+          </a:custGeom>
+        </p:spPr>
+      </p:sp>
+      <p:sp>
+        <p:nvSpPr>
+          <p:cNvPr id="409" name="Google Shape;409;g2397cb0cd5f_0_43:notes"/>
           <p:cNvSpPr txBox="1"/>
           <p:nvPr>
             <p:ph idx="1" type="body"/>
@@ -17932,7 +18032,7 @@
             <a:tbl>
               <a:tblPr>
                 <a:noFill/>
-                <a:tableStyleId>{557111F9-E64D-40C2-AF79-A55EB1FDECA5}</a:tableStyleId>
+                <a:tableStyleId>{7891F278-94DB-47D7-BB73-DE8431C95FB5}</a:tableStyleId>
               </a:tblPr>
               <a:tblGrid>
                 <a:gridCol w="2103125"/>
@@ -20359,7 +20459,7 @@
             <a:tbl>
               <a:tblPr>
                 <a:noFill/>
-                <a:tableStyleId>{557111F9-E64D-40C2-AF79-A55EB1FDECA5}</a:tableStyleId>
+                <a:tableStyleId>{7891F278-94DB-47D7-BB73-DE8431C95FB5}</a:tableStyleId>
               </a:tblPr>
               <a:tblGrid>
                 <a:gridCol w="638675"/>
@@ -21757,20 +21857,20 @@
         </p:nvSpPr>
         <p:spPr>
           <a:xfrm>
-            <a:off x="0" y="-7"/>
-            <a:ext cx="9144000" cy="2386500"/>
+            <a:off x="0" y="0"/>
+            <a:ext cx="9144000" cy="685800"/>
           </a:xfrm>
           <a:prstGeom prst="rect">
             <a:avLst/>
           </a:prstGeom>
         </p:spPr>
         <p:txBody>
-          <a:bodyPr anchorCtr="0" anchor="b" bIns="274300" lIns="91425" spcFirstLastPara="1" rIns="91425" wrap="square" tIns="91425">
+          <a:bodyPr anchorCtr="0" anchor="ctr" bIns="91425" lIns="274300" spcFirstLastPara="1" rIns="91425" wrap="square" tIns="91425">
             <a:noAutofit/>
           </a:bodyPr>
           <a:lstStyle/>
           <a:p>
-            <a:pPr indent="0" lvl="0" marL="0" rtl="0" algn="ctr">
+            <a:pPr indent="0" lvl="0" marL="0" rtl="0" algn="l">
               <a:spcBef>
                 <a:spcPts val="0"/>
               </a:spcBef>
@@ -21781,11 +21881,201 @@
             </a:pPr>
             <a:r>
               <a:rPr lang="en"/>
-              <a:t>3</a:t>
-            </a:r>
-            <a:r>
+              <a:t>Managing Time in Team Meetings</a:t>
+            </a:r>
+            <a:endParaRPr/>
+          </a:p>
+        </p:txBody>
+      </p:sp>
+      <p:sp>
+        <p:nvSpPr>
+          <p:cNvPr id="324" name="Google Shape;324;p46"/>
+          <p:cNvSpPr txBox="1"/>
+          <p:nvPr>
+            <p:ph idx="12" type="sldNum"/>
+          </p:nvPr>
+        </p:nvSpPr>
+        <p:spPr>
+          <a:xfrm>
+            <a:off x="7315202" y="4416550"/>
+            <a:ext cx="1828800" cy="731400"/>
+          </a:xfrm>
+          <a:prstGeom prst="rect">
+            <a:avLst/>
+          </a:prstGeom>
+        </p:spPr>
+        <p:txBody>
+          <a:bodyPr anchorCtr="0" anchor="b" bIns="91425" lIns="91425" spcFirstLastPara="1" rIns="91425" wrap="square" tIns="91425">
+            <a:noAutofit/>
+          </a:bodyPr>
+          <a:lstStyle/>
+          <a:p>
+            <a:pPr indent="0" lvl="0" marL="0" rtl="0" algn="r">
+              <a:spcBef>
+                <a:spcPts val="0"/>
+              </a:spcBef>
+              <a:spcAft>
+                <a:spcPts val="0"/>
+              </a:spcAft>
+              <a:buNone/>
+            </a:pPr>
+            <a:fld id="{00000000-1234-1234-1234-123412341234}" type="slidenum">
               <a:rPr lang="en"/>
-              <a:t>. Software Bill of Materials</a:t>
+              <a:t>‹#›</a:t>
+            </a:fld>
+            <a:endParaRPr/>
+          </a:p>
+          <a:p>
+            <a:pPr indent="0" lvl="0" marL="0" rtl="0" algn="r">
+              <a:spcBef>
+                <a:spcPts val="0"/>
+              </a:spcBef>
+              <a:spcAft>
+                <a:spcPts val="0"/>
+              </a:spcAft>
+              <a:buNone/>
+            </a:pPr>
+            <a:r>
+              <a:rPr b="0" lang="en" sz="900" u="sng">
+                <a:solidFill>
+                  <a:schemeClr val="hlink"/>
+                </a:solidFill>
+                <a:hlinkClick r:id="rId3"/>
+              </a:rPr>
+              <a:t>https://oss.cs.fau.de</a:t>
+            </a:r>
+            <a:r>
+              <a:rPr b="0" lang="en" sz="900">
+                <a:solidFill>
+                  <a:schemeClr val="dk2"/>
+                </a:solidFill>
+              </a:rPr>
+              <a:t> </a:t>
+            </a:r>
+            <a:endParaRPr b="0" sz="900">
+              <a:solidFill>
+                <a:schemeClr val="dk2"/>
+              </a:solidFill>
+            </a:endParaRPr>
+          </a:p>
+        </p:txBody>
+      </p:sp>
+      <p:sp>
+        <p:nvSpPr>
+          <p:cNvPr id="325" name="Google Shape;325;p46"/>
+          <p:cNvSpPr txBox="1"/>
+          <p:nvPr>
+            <p:ph idx="1" type="body"/>
+          </p:nvPr>
+        </p:nvSpPr>
+        <p:spPr>
+          <a:xfrm>
+            <a:off x="274320" y="914400"/>
+            <a:ext cx="8595300" cy="4114800"/>
+          </a:xfrm>
+          <a:prstGeom prst="rect">
+            <a:avLst/>
+          </a:prstGeom>
+        </p:spPr>
+        <p:txBody>
+          <a:bodyPr anchorCtr="0" anchor="t" bIns="0" lIns="0" spcFirstLastPara="1" rIns="0" wrap="square" tIns="0">
+            <a:noAutofit/>
+          </a:bodyPr>
+          <a:lstStyle/>
+          <a:p>
+            <a:pPr indent="0" lvl="0" marL="0" rtl="0" algn="l">
+              <a:spcBef>
+                <a:spcPts val="0"/>
+              </a:spcBef>
+              <a:spcAft>
+                <a:spcPts val="0"/>
+              </a:spcAft>
+              <a:buNone/>
+            </a:pPr>
+            <a:r>
+              <a:rPr lang="en"/>
+              <a:t>You should aim to finish in time</a:t>
+            </a:r>
+            <a:endParaRPr/>
+          </a:p>
+          <a:p>
+            <a:pPr indent="-342900" lvl="0" marL="457200" rtl="0" algn="l">
+              <a:spcBef>
+                <a:spcPts val="1200"/>
+              </a:spcBef>
+              <a:spcAft>
+                <a:spcPts val="0"/>
+              </a:spcAft>
+              <a:buSzPts val="1800"/>
+              <a:buChar char="●"/>
+            </a:pPr>
+            <a:r>
+              <a:rPr lang="en"/>
+              <a:t>You want to finish in time to be ready for the upcoming sprint</a:t>
+            </a:r>
+            <a:endParaRPr/>
+          </a:p>
+          <a:p>
+            <a:pPr indent="0" lvl="0" marL="0" rtl="0" algn="l">
+              <a:spcBef>
+                <a:spcPts val="1200"/>
+              </a:spcBef>
+              <a:spcAft>
+                <a:spcPts val="0"/>
+              </a:spcAft>
+              <a:buNone/>
+            </a:pPr>
+            <a:r>
+              <a:rPr lang="en"/>
+              <a:t>In the beginning, retrospectives may take more time</a:t>
+            </a:r>
+            <a:endParaRPr/>
+          </a:p>
+          <a:p>
+            <a:pPr indent="-342900" lvl="0" marL="457200" rtl="0" algn="l">
+              <a:spcBef>
+                <a:spcPts val="1200"/>
+              </a:spcBef>
+              <a:spcAft>
+                <a:spcPts val="0"/>
+              </a:spcAft>
+              <a:buSzPts val="1800"/>
+              <a:buChar char="●"/>
+            </a:pPr>
+            <a:r>
+              <a:rPr lang="en"/>
+              <a:t>If they consume too much time, move them outside the team meeting</a:t>
+            </a:r>
+            <a:endParaRPr/>
+          </a:p>
+          <a:p>
+            <a:pPr indent="0" lvl="0" marL="0" rtl="0" algn="l">
+              <a:spcBef>
+                <a:spcPts val="1200"/>
+              </a:spcBef>
+              <a:spcAft>
+                <a:spcPts val="0"/>
+              </a:spcAft>
+              <a:buNone/>
+            </a:pPr>
+            <a:r>
+              <a:rPr lang="en"/>
+              <a:t>45 min. retrospectives hurt everyone</a:t>
+            </a:r>
+            <a:endParaRPr/>
+          </a:p>
+          <a:p>
+            <a:pPr indent="0" lvl="0" marL="0" rtl="0" algn="l">
+              <a:spcBef>
+                <a:spcPts val="1200"/>
+              </a:spcBef>
+              <a:spcAft>
+                <a:spcPts val="1200"/>
+              </a:spcAft>
+              <a:buNone/>
+            </a:pPr>
+            <a:r>
+              <a:t/>
             </a:r>
             <a:endParaRPr/>
           </a:p>
@@ -21804,7 +22094,7 @@
   <p:cSld>
     <p:spTree>
       <p:nvGrpSpPr>
-        <p:cNvPr id="327" name="Shape 327"/>
+        <p:cNvPr id="329" name="Shape 329"/>
         <p:cNvGrpSpPr/>
         <p:nvPr/>
       </p:nvGrpSpPr>
@@ -21818,7 +22108,76 @@
       </p:grpSpPr>
       <p:sp>
         <p:nvSpPr>
-          <p:cNvPr id="328" name="Google Shape;328;p47"/>
+          <p:cNvPr id="330" name="Google Shape;330;p47"/>
+          <p:cNvSpPr txBox="1"/>
+          <p:nvPr>
+            <p:ph type="title"/>
+          </p:nvPr>
+        </p:nvSpPr>
+        <p:spPr>
+          <a:xfrm>
+            <a:off x="0" y="-7"/>
+            <a:ext cx="9144000" cy="2386500"/>
+          </a:xfrm>
+          <a:prstGeom prst="rect">
+            <a:avLst/>
+          </a:prstGeom>
+        </p:spPr>
+        <p:txBody>
+          <a:bodyPr anchorCtr="0" anchor="b" bIns="274300" lIns="91425" spcFirstLastPara="1" rIns="91425" wrap="square" tIns="91425">
+            <a:noAutofit/>
+          </a:bodyPr>
+          <a:lstStyle/>
+          <a:p>
+            <a:pPr indent="0" lvl="0" marL="0" rtl="0" algn="ctr">
+              <a:spcBef>
+                <a:spcPts val="0"/>
+              </a:spcBef>
+              <a:spcAft>
+                <a:spcPts val="0"/>
+              </a:spcAft>
+              <a:buNone/>
+            </a:pPr>
+            <a:r>
+              <a:rPr lang="en"/>
+              <a:t>3</a:t>
+            </a:r>
+            <a:r>
+              <a:rPr lang="en"/>
+              <a:t>. Software Bill of Materials</a:t>
+            </a:r>
+            <a:endParaRPr/>
+          </a:p>
+        </p:txBody>
+      </p:sp>
+    </p:spTree>
+  </p:cSld>
+  <p:clrMapOvr>
+    <a:masterClrMapping/>
+  </p:clrMapOvr>
+</p:sld>
+</file>
+
+<file path=ppt/slides/slide34.xml><?xml version="1.0" encoding="utf-8"?>
+<p:sld xmlns:a="http://schemas.openxmlformats.org/drawingml/2006/main" xmlns:r="http://schemas.openxmlformats.org/officeDocument/2006/relationships" xmlns:mc="http://schemas.openxmlformats.org/markup-compatibility/2006" xmlns:mv="urn:schemas-microsoft-com:mac:vml" xmlns:p="http://schemas.openxmlformats.org/presentationml/2006/main" xmlns:c="http://schemas.openxmlformats.org/drawingml/2006/chart" xmlns:dgm="http://schemas.openxmlformats.org/drawingml/2006/diagram" xmlns:o="urn:schemas-microsoft-com:office:office" xmlns:v="urn:schemas-microsoft-com:vml" xmlns:pvml="urn:schemas-microsoft-com:office:powerpoint" xmlns:com="http://schemas.openxmlformats.org/drawingml/2006/compatibility" xmlns:p14="http://schemas.microsoft.com/office/powerpoint/2010/main" xmlns:p15="http://schemas.microsoft.com/office/powerpoint/2012/main" xmlns:ahyp="http://schemas.microsoft.com/office/drawing/2018/hyperlinkcolor">
+  <p:cSld>
+    <p:spTree>
+      <p:nvGrpSpPr>
+        <p:cNvPr id="334" name="Shape 334"/>
+        <p:cNvGrpSpPr/>
+        <p:nvPr/>
+      </p:nvGrpSpPr>
+      <p:grpSpPr>
+        <a:xfrm>
+          <a:off x="0" y="0"/>
+          <a:ext cx="0" cy="0"/>
+          <a:chOff x="0" y="0"/>
+          <a:chExt cx="0" cy="0"/>
+        </a:xfrm>
+      </p:grpSpPr>
+      <p:sp>
+        <p:nvSpPr>
+          <p:cNvPr id="335" name="Google Shape;335;p48"/>
           <p:cNvSpPr txBox="1"/>
           <p:nvPr>
             <p:ph type="title"/>
@@ -21858,7 +22217,7 @@
       </p:sp>
       <p:sp>
         <p:nvSpPr>
-          <p:cNvPr id="329" name="Google Shape;329;p47"/>
+          <p:cNvPr id="336" name="Google Shape;336;p48"/>
           <p:cNvSpPr txBox="1"/>
           <p:nvPr>
             <p:ph idx="1" type="body"/>
@@ -22004,7 +22363,7 @@
       </p:sp>
       <p:sp>
         <p:nvSpPr>
-          <p:cNvPr id="330" name="Google Shape;330;p47"/>
+          <p:cNvPr id="337" name="Google Shape;337;p48"/>
           <p:cNvSpPr txBox="1"/>
           <p:nvPr>
             <p:ph idx="12" type="sldNum"/>
@@ -22077,7 +22436,7 @@
       </p:sp>
       <p:sp>
         <p:nvSpPr>
-          <p:cNvPr id="331" name="Google Shape;331;p47"/>
+          <p:cNvPr id="338" name="Google Shape;338;p48"/>
           <p:cNvSpPr txBox="1"/>
           <p:nvPr/>
         </p:nvSpPr>
@@ -22125,12 +22484,12 @@
 </p:sld>
 </file>
 
-<file path=ppt/slides/slide34.xml><?xml version="1.0" encoding="utf-8"?>
+<file path=ppt/slides/slide35.xml><?xml version="1.0" encoding="utf-8"?>
 <p:sld xmlns:a="http://schemas.openxmlformats.org/drawingml/2006/main" xmlns:r="http://schemas.openxmlformats.org/officeDocument/2006/relationships" xmlns:mc="http://schemas.openxmlformats.org/markup-compatibility/2006" xmlns:mv="urn:schemas-microsoft-com:mac:vml" xmlns:p="http://schemas.openxmlformats.org/presentationml/2006/main" xmlns:c="http://schemas.openxmlformats.org/drawingml/2006/chart" xmlns:dgm="http://schemas.openxmlformats.org/drawingml/2006/diagram" xmlns:o="urn:schemas-microsoft-com:office:office" xmlns:v="urn:schemas-microsoft-com:vml" xmlns:pvml="urn:schemas-microsoft-com:office:powerpoint" xmlns:com="http://schemas.openxmlformats.org/drawingml/2006/compatibility" xmlns:p14="http://schemas.microsoft.com/office/powerpoint/2010/main" xmlns:p15="http://schemas.microsoft.com/office/powerpoint/2012/main" xmlns:ahyp="http://schemas.microsoft.com/office/drawing/2018/hyperlinkcolor">
   <p:cSld>
     <p:spTree>
       <p:nvGrpSpPr>
-        <p:cNvPr id="335" name="Shape 335"/>
+        <p:cNvPr id="342" name="Shape 342"/>
         <p:cNvGrpSpPr/>
         <p:nvPr/>
       </p:nvGrpSpPr>
@@ -22144,7 +22503,7 @@
       </p:grpSpPr>
       <p:sp>
         <p:nvSpPr>
-          <p:cNvPr id="336" name="Google Shape;336;p48"/>
+          <p:cNvPr id="343" name="Google Shape;343;p49"/>
           <p:cNvSpPr txBox="1"/>
           <p:nvPr>
             <p:ph type="title"/>
@@ -22184,7 +22543,7 @@
       </p:sp>
       <p:sp>
         <p:nvSpPr>
-          <p:cNvPr id="337" name="Google Shape;337;p48"/>
+          <p:cNvPr id="344" name="Google Shape;344;p49"/>
           <p:cNvSpPr txBox="1"/>
           <p:nvPr>
             <p:ph idx="1" type="body"/>
@@ -22224,7 +22583,7 @@
       </p:sp>
       <p:sp>
         <p:nvSpPr>
-          <p:cNvPr id="338" name="Google Shape;338;p48"/>
+          <p:cNvPr id="345" name="Google Shape;345;p49"/>
           <p:cNvSpPr txBox="1"/>
           <p:nvPr>
             <p:ph idx="12" type="sldNum"/>
@@ -22297,7 +22656,7 @@
       </p:sp>
       <p:graphicFrame>
         <p:nvGraphicFramePr>
-          <p:cNvPr id="339" name="Google Shape;339;p48"/>
+          <p:cNvPr id="346" name="Google Shape;346;p49"/>
           <p:cNvGraphicFramePr/>
           <p:nvPr/>
         </p:nvGraphicFramePr>
@@ -22310,7 +22669,7 @@
             <a:tbl>
               <a:tblPr>
                 <a:noFill/>
-                <a:tableStyleId>{557111F9-E64D-40C2-AF79-A55EB1FDECA5}</a:tableStyleId>
+                <a:tableStyleId>{7891F278-94DB-47D7-BB73-DE8431C95FB5}</a:tableStyleId>
               </a:tblPr>
               <a:tblGrid>
                 <a:gridCol w="1280725"/>
@@ -23499,233 +23858,6 @@
 </p:sld>
 </file>
 
-<file path=ppt/slides/slide35.xml><?xml version="1.0" encoding="utf-8"?>
-<p:sld xmlns:a="http://schemas.openxmlformats.org/drawingml/2006/main" xmlns:r="http://schemas.openxmlformats.org/officeDocument/2006/relationships" xmlns:mc="http://schemas.openxmlformats.org/markup-compatibility/2006" xmlns:mv="urn:schemas-microsoft-com:mac:vml" xmlns:p="http://schemas.openxmlformats.org/presentationml/2006/main" xmlns:c="http://schemas.openxmlformats.org/drawingml/2006/chart" xmlns:dgm="http://schemas.openxmlformats.org/drawingml/2006/diagram" xmlns:o="urn:schemas-microsoft-com:office:office" xmlns:v="urn:schemas-microsoft-com:vml" xmlns:pvml="urn:schemas-microsoft-com:office:powerpoint" xmlns:com="http://schemas.openxmlformats.org/drawingml/2006/compatibility" xmlns:p14="http://schemas.microsoft.com/office/powerpoint/2010/main" xmlns:p15="http://schemas.microsoft.com/office/powerpoint/2012/main" xmlns:ahyp="http://schemas.microsoft.com/office/drawing/2018/hyperlinkcolor">
-  <p:cSld>
-    <p:spTree>
-      <p:nvGrpSpPr>
-        <p:cNvPr id="343" name="Shape 343"/>
-        <p:cNvGrpSpPr/>
-        <p:nvPr/>
-      </p:nvGrpSpPr>
-      <p:grpSpPr>
-        <a:xfrm>
-          <a:off x="0" y="0"/>
-          <a:ext cx="0" cy="0"/>
-          <a:chOff x="0" y="0"/>
-          <a:chExt cx="0" cy="0"/>
-        </a:xfrm>
-      </p:grpSpPr>
-      <p:sp>
-        <p:nvSpPr>
-          <p:cNvPr id="344" name="Google Shape;344;p49"/>
-          <p:cNvSpPr txBox="1"/>
-          <p:nvPr>
-            <p:ph type="title"/>
-          </p:nvPr>
-        </p:nvSpPr>
-        <p:spPr>
-          <a:xfrm>
-            <a:off x="0" y="0"/>
-            <a:ext cx="9144000" cy="685800"/>
-          </a:xfrm>
-          <a:prstGeom prst="rect">
-            <a:avLst/>
-          </a:prstGeom>
-        </p:spPr>
-        <p:txBody>
-          <a:bodyPr anchorCtr="0" anchor="ctr" bIns="91425" lIns="274300" spcFirstLastPara="1" rIns="91425" wrap="square" tIns="91425">
-            <a:noAutofit/>
-          </a:bodyPr>
-          <a:lstStyle/>
-          <a:p>
-            <a:pPr indent="0" lvl="0" marL="0" rtl="0" algn="l">
-              <a:spcBef>
-                <a:spcPts val="0"/>
-              </a:spcBef>
-              <a:spcAft>
-                <a:spcPts val="0"/>
-              </a:spcAft>
-              <a:buNone/>
-            </a:pPr>
-            <a:r>
-              <a:rPr lang="en"/>
-              <a:t>Regular Deliverable: Software Bill of Materials</a:t>
-            </a:r>
-            <a:endParaRPr/>
-          </a:p>
-        </p:txBody>
-      </p:sp>
-      <p:sp>
-        <p:nvSpPr>
-          <p:cNvPr id="345" name="Google Shape;345;p49"/>
-          <p:cNvSpPr txBox="1"/>
-          <p:nvPr>
-            <p:ph idx="1" type="body"/>
-          </p:nvPr>
-        </p:nvSpPr>
-        <p:spPr>
-          <a:xfrm>
-            <a:off x="274320" y="914400"/>
-            <a:ext cx="8595300" cy="4114800"/>
-          </a:xfrm>
-          <a:prstGeom prst="rect">
-            <a:avLst/>
-          </a:prstGeom>
-        </p:spPr>
-        <p:txBody>
-          <a:bodyPr anchorCtr="0" anchor="t" bIns="0" lIns="0" spcFirstLastPara="1" rIns="0" wrap="square" tIns="0">
-            <a:noAutofit/>
-          </a:bodyPr>
-          <a:lstStyle/>
-          <a:p>
-            <a:pPr indent="0" lvl="0" marL="0" rtl="0" algn="l">
-              <a:spcBef>
-                <a:spcPts val="0"/>
-              </a:spcBef>
-              <a:spcAft>
-                <a:spcPts val="0"/>
-              </a:spcAft>
-              <a:buNone/>
-            </a:pPr>
-            <a:r>
-              <a:rPr lang="en"/>
-              <a:t>Please initialize your software bill of materials and keep it up-to-date</a:t>
-            </a:r>
-            <a:endParaRPr/>
-          </a:p>
-          <a:p>
-            <a:pPr indent="-342900" lvl="0" marL="457200" rtl="0" algn="l">
-              <a:spcBef>
-                <a:spcPts val="1200"/>
-              </a:spcBef>
-              <a:spcAft>
-                <a:spcPts val="0"/>
-              </a:spcAft>
-              <a:buSzPts val="1800"/>
-              <a:buChar char="●"/>
-            </a:pPr>
-            <a:r>
-              <a:rPr lang="en"/>
-              <a:t>You can limit this to your first-level dependencies</a:t>
-            </a:r>
-            <a:endParaRPr/>
-          </a:p>
-          <a:p>
-            <a:pPr indent="0" lvl="0" marL="0" rtl="0" algn="l">
-              <a:spcBef>
-                <a:spcPts val="1200"/>
-              </a:spcBef>
-              <a:spcAft>
-                <a:spcPts val="0"/>
-              </a:spcAft>
-              <a:buNone/>
-            </a:pPr>
-            <a:r>
-              <a:rPr lang="en"/>
-              <a:t>You can use a tool, e.g. a build tool plugin to generate the SBOM</a:t>
-            </a:r>
-            <a:endParaRPr/>
-          </a:p>
-          <a:p>
-            <a:pPr indent="0" lvl="0" marL="0" rtl="0" algn="l">
-              <a:spcBef>
-                <a:spcPts val="1200"/>
-              </a:spcBef>
-              <a:spcAft>
-                <a:spcPts val="1200"/>
-              </a:spcAft>
-              <a:buNone/>
-            </a:pPr>
-            <a:r>
-              <a:rPr lang="en"/>
-              <a:t>Please update every time you change your dependencies </a:t>
-            </a:r>
-            <a:endParaRPr/>
-          </a:p>
-        </p:txBody>
-      </p:sp>
-      <p:sp>
-        <p:nvSpPr>
-          <p:cNvPr id="346" name="Google Shape;346;p49"/>
-          <p:cNvSpPr txBox="1"/>
-          <p:nvPr>
-            <p:ph idx="12" type="sldNum"/>
-          </p:nvPr>
-        </p:nvSpPr>
-        <p:spPr>
-          <a:xfrm>
-            <a:off x="7315202" y="4416550"/>
-            <a:ext cx="1828800" cy="731400"/>
-          </a:xfrm>
-          <a:prstGeom prst="rect">
-            <a:avLst/>
-          </a:prstGeom>
-        </p:spPr>
-        <p:txBody>
-          <a:bodyPr anchorCtr="0" anchor="b" bIns="91425" lIns="91425" spcFirstLastPara="1" rIns="91425" wrap="square" tIns="91425">
-            <a:noAutofit/>
-          </a:bodyPr>
-          <a:lstStyle/>
-          <a:p>
-            <a:pPr indent="0" lvl="0" marL="0" rtl="0" algn="r">
-              <a:spcBef>
-                <a:spcPts val="0"/>
-              </a:spcBef>
-              <a:spcAft>
-                <a:spcPts val="0"/>
-              </a:spcAft>
-              <a:buNone/>
-            </a:pPr>
-            <a:fld id="{00000000-1234-1234-1234-123412341234}" type="slidenum">
-              <a:rPr lang="en">
-                <a:solidFill>
-                  <a:schemeClr val="dk1"/>
-                </a:solidFill>
-              </a:rPr>
-              <a:t>‹#›</a:t>
-            </a:fld>
-            <a:endParaRPr>
-              <a:solidFill>
-                <a:schemeClr val="dk1"/>
-              </a:solidFill>
-            </a:endParaRPr>
-          </a:p>
-          <a:p>
-            <a:pPr indent="0" lvl="0" marL="0" rtl="0" algn="r">
-              <a:spcBef>
-                <a:spcPts val="0"/>
-              </a:spcBef>
-              <a:spcAft>
-                <a:spcPts val="0"/>
-              </a:spcAft>
-              <a:buNone/>
-            </a:pPr>
-            <a:r>
-              <a:rPr b="0" lang="en" sz="900" u="sng">
-                <a:solidFill>
-                  <a:schemeClr val="hlink"/>
-                </a:solidFill>
-                <a:hlinkClick r:id="rId3"/>
-              </a:rPr>
-              <a:t>https://oss.cs.fau.de</a:t>
-            </a:r>
-            <a:r>
-              <a:rPr b="0" lang="en" sz="900"/>
-              <a:t> </a:t>
-            </a:r>
-            <a:endParaRPr b="0" sz="900"/>
-          </a:p>
-        </p:txBody>
-      </p:sp>
-    </p:spTree>
-  </p:cSld>
-  <p:clrMapOvr>
-    <a:masterClrMapping/>
-  </p:clrMapOvr>
-</p:sld>
-</file>
-
 <file path=ppt/slides/slide36.xml><?xml version="1.0" encoding="utf-8"?>
 <p:sld xmlns:a="http://schemas.openxmlformats.org/drawingml/2006/main" xmlns:r="http://schemas.openxmlformats.org/officeDocument/2006/relationships" xmlns:mc="http://schemas.openxmlformats.org/markup-compatibility/2006" xmlns:mv="urn:schemas-microsoft-com:mac:vml" xmlns:p="http://schemas.openxmlformats.org/presentationml/2006/main" xmlns:c="http://schemas.openxmlformats.org/drawingml/2006/chart" xmlns:dgm="http://schemas.openxmlformats.org/drawingml/2006/diagram" xmlns:o="urn:schemas-microsoft-com:office:office" xmlns:v="urn:schemas-microsoft-com:vml" xmlns:pvml="urn:schemas-microsoft-com:office:powerpoint" xmlns:com="http://schemas.openxmlformats.org/drawingml/2006/compatibility" xmlns:p14="http://schemas.microsoft.com/office/powerpoint/2010/main" xmlns:p15="http://schemas.microsoft.com/office/powerpoint/2012/main" xmlns:ahyp="http://schemas.microsoft.com/office/drawing/2018/hyperlinkcolor">
   <p:cSld>
@@ -23753,71 +23885,6 @@
         </p:nvSpPr>
         <p:spPr>
           <a:xfrm>
-            <a:off x="0" y="-7"/>
-            <a:ext cx="9144000" cy="2386500"/>
-          </a:xfrm>
-          <a:prstGeom prst="rect">
-            <a:avLst/>
-          </a:prstGeom>
-        </p:spPr>
-        <p:txBody>
-          <a:bodyPr anchorCtr="0" anchor="b" bIns="274300" lIns="91425" spcFirstLastPara="1" rIns="91425" wrap="square" tIns="91425">
-            <a:noAutofit/>
-          </a:bodyPr>
-          <a:lstStyle/>
-          <a:p>
-            <a:pPr indent="0" lvl="0" marL="0" rtl="0" algn="ctr">
-              <a:spcBef>
-                <a:spcPts val="0"/>
-              </a:spcBef>
-              <a:spcAft>
-                <a:spcPts val="0"/>
-              </a:spcAft>
-              <a:buNone/>
-            </a:pPr>
-            <a:r>
-              <a:rPr lang="en"/>
-              <a:t>4. Software Architecture</a:t>
-            </a:r>
-            <a:endParaRPr/>
-          </a:p>
-        </p:txBody>
-      </p:sp>
-    </p:spTree>
-  </p:cSld>
-  <p:clrMapOvr>
-    <a:masterClrMapping/>
-  </p:clrMapOvr>
-</p:sld>
-</file>
-
-<file path=ppt/slides/slide37.xml><?xml version="1.0" encoding="utf-8"?>
-<p:sld xmlns:a="http://schemas.openxmlformats.org/drawingml/2006/main" xmlns:r="http://schemas.openxmlformats.org/officeDocument/2006/relationships" xmlns:mc="http://schemas.openxmlformats.org/markup-compatibility/2006" xmlns:mv="urn:schemas-microsoft-com:mac:vml" xmlns:p="http://schemas.openxmlformats.org/presentationml/2006/main" xmlns:c="http://schemas.openxmlformats.org/drawingml/2006/chart" xmlns:dgm="http://schemas.openxmlformats.org/drawingml/2006/diagram" xmlns:o="urn:schemas-microsoft-com:office:office" xmlns:v="urn:schemas-microsoft-com:vml" xmlns:pvml="urn:schemas-microsoft-com:office:powerpoint" xmlns:com="http://schemas.openxmlformats.org/drawingml/2006/compatibility" xmlns:p14="http://schemas.microsoft.com/office/powerpoint/2010/main" xmlns:p15="http://schemas.microsoft.com/office/powerpoint/2012/main" xmlns:ahyp="http://schemas.microsoft.com/office/drawing/2018/hyperlinkcolor">
-  <p:cSld>
-    <p:spTree>
-      <p:nvGrpSpPr>
-        <p:cNvPr id="355" name="Shape 355"/>
-        <p:cNvGrpSpPr/>
-        <p:nvPr/>
-      </p:nvGrpSpPr>
-      <p:grpSpPr>
-        <a:xfrm>
-          <a:off x="0" y="0"/>
-          <a:ext cx="0" cy="0"/>
-          <a:chOff x="0" y="0"/>
-          <a:chExt cx="0" cy="0"/>
-        </a:xfrm>
-      </p:grpSpPr>
-      <p:sp>
-        <p:nvSpPr>
-          <p:cNvPr id="356" name="Google Shape;356;p51"/>
-          <p:cNvSpPr txBox="1"/>
-          <p:nvPr>
-            <p:ph type="title"/>
-          </p:nvPr>
-        </p:nvSpPr>
-        <p:spPr>
-          <a:xfrm>
             <a:off x="0" y="0"/>
             <a:ext cx="9144000" cy="685800"/>
           </a:xfrm>
@@ -23842,7 +23909,7 @@
             </a:pPr>
             <a:r>
               <a:rPr lang="en"/>
-              <a:t>Agile Architecture?!</a:t>
+              <a:t>Regular Deliverable: Software Bill of Materials</a:t>
             </a:r>
             <a:endParaRPr/>
           </a:p>
@@ -23850,7 +23917,7 @@
       </p:sp>
       <p:sp>
         <p:nvSpPr>
-          <p:cNvPr id="357" name="Google Shape;357;p51"/>
+          <p:cNvPr id="352" name="Google Shape;352;p50"/>
           <p:cNvSpPr txBox="1"/>
           <p:nvPr>
             <p:ph idx="1" type="body"/>
@@ -23882,7 +23949,7 @@
             </a:pPr>
             <a:r>
               <a:rPr lang="en"/>
-              <a:t>Agile methods eschew detailed planning</a:t>
+              <a:t>Please initialize your software bill of materials and keep it up-to-date</a:t>
             </a:r>
             <a:endParaRPr/>
           </a:p>
@@ -23899,7 +23966,7 @@
             </a:pPr>
             <a:r>
               <a:rPr lang="en"/>
-              <a:t>The proof of the software is in the feedback of the customer</a:t>
+              <a:t>You can limit this to your first-level dependencies</a:t>
             </a:r>
             <a:endParaRPr/>
           </a:p>
@@ -23915,108 +23982,23 @@
             </a:pPr>
             <a:r>
               <a:rPr lang="en"/>
-              <a:t>Software architecture is the overall design of a system</a:t>
+              <a:t>You can use a tool, e.g. a build tool plugin to generate the SBOM</a:t>
             </a:r>
             <a:endParaRPr/>
           </a:p>
           <a:p>
-            <a:pPr indent="-342900" lvl="0" marL="457200" rtl="0" algn="l">
+            <a:pPr indent="0" lvl="0" marL="0" rtl="0" algn="l">
               <a:spcBef>
                 <a:spcPts val="1200"/>
               </a:spcBef>
               <a:spcAft>
-                <a:spcPts val="0"/>
-              </a:spcAft>
-              <a:buSzPts val="1800"/>
-              <a:buChar char="●"/>
+                <a:spcPts val="1200"/>
+              </a:spcAft>
+              <a:buNone/>
             </a:pPr>
             <a:r>
               <a:rPr lang="en"/>
-              <a:t>Including static (structural) and dynamic aspects</a:t>
-            </a:r>
-            <a:endParaRPr/>
-          </a:p>
-          <a:p>
-            <a:pPr indent="-342900" lvl="0" marL="457200" rtl="0" algn="l">
-              <a:spcBef>
-                <a:spcPts val="0"/>
-              </a:spcBef>
-              <a:spcAft>
-                <a:spcPts val="0"/>
-              </a:spcAft>
-              <a:buSzPts val="1800"/>
-              <a:buChar char="●"/>
-            </a:pPr>
-            <a:r>
-              <a:rPr lang="en"/>
-              <a:t>Covering everything of wide impact to the system</a:t>
-            </a:r>
-            <a:endParaRPr/>
-          </a:p>
-          <a:p>
-            <a:pPr indent="-342900" lvl="0" marL="457200" rtl="0" algn="l">
-              <a:spcBef>
-                <a:spcPts val="0"/>
-              </a:spcBef>
-              <a:spcAft>
-                <a:spcPts val="0"/>
-              </a:spcAft>
-              <a:buSzPts val="1800"/>
-              <a:buChar char="●"/>
-            </a:pPr>
-            <a:r>
-              <a:rPr lang="en"/>
-              <a:t>Ignoring everything with limited (localized) impact</a:t>
-            </a:r>
-            <a:endParaRPr/>
-          </a:p>
-          <a:p>
-            <a:pPr indent="0" lvl="0" marL="0" rtl="0" algn="l">
-              <a:spcBef>
-                <a:spcPts val="1200"/>
-              </a:spcBef>
-              <a:spcAft>
-                <a:spcPts val="0"/>
-              </a:spcAft>
-              <a:buNone/>
-            </a:pPr>
-            <a:r>
-              <a:rPr lang="en"/>
-              <a:t>Agile software architecture is software architecture that</a:t>
-            </a:r>
-            <a:endParaRPr/>
-          </a:p>
-          <a:p>
-            <a:pPr indent="-342900" lvl="0" marL="457200" rtl="0" algn="l">
-              <a:spcBef>
-                <a:spcPts val="1200"/>
-              </a:spcBef>
-              <a:spcAft>
-                <a:spcPts val="0"/>
-              </a:spcAft>
-              <a:buSzPts val="1800"/>
-              <a:buChar char="●"/>
-            </a:pPr>
-            <a:r>
-              <a:rPr lang="en"/>
-              <a:t>Emerges from risk-adjusted planning / visibility</a:t>
-            </a:r>
-            <a:endParaRPr/>
-          </a:p>
-          <a:p>
-            <a:pPr indent="-342900" lvl="0" marL="457200" rtl="0" algn="l">
-              <a:spcBef>
-                <a:spcPts val="0"/>
-              </a:spcBef>
-              <a:spcAft>
-                <a:spcPts val="0"/>
-              </a:spcAft>
-              <a:buSzPts val="1800"/>
-              <a:buChar char="●"/>
-            </a:pPr>
-            <a:r>
-              <a:rPr lang="en"/>
-              <a:t>Delays architectural investment to the last minute</a:t>
+              <a:t>Please update every time you change your dependencies </a:t>
             </a:r>
             <a:endParaRPr/>
           </a:p>
@@ -24024,7 +24006,7 @@
       </p:sp>
       <p:sp>
         <p:nvSpPr>
-          <p:cNvPr id="358" name="Google Shape;358;p51"/>
+          <p:cNvPr id="353" name="Google Shape;353;p50"/>
           <p:cNvSpPr txBox="1"/>
           <p:nvPr>
             <p:ph idx="12" type="sldNum"/>
@@ -24092,6 +24074,71 @@
               <a:t> </a:t>
             </a:r>
             <a:endParaRPr b="0" sz="900"/>
+          </a:p>
+        </p:txBody>
+      </p:sp>
+    </p:spTree>
+  </p:cSld>
+  <p:clrMapOvr>
+    <a:masterClrMapping/>
+  </p:clrMapOvr>
+</p:sld>
+</file>
+
+<file path=ppt/slides/slide37.xml><?xml version="1.0" encoding="utf-8"?>
+<p:sld xmlns:a="http://schemas.openxmlformats.org/drawingml/2006/main" xmlns:r="http://schemas.openxmlformats.org/officeDocument/2006/relationships" xmlns:mc="http://schemas.openxmlformats.org/markup-compatibility/2006" xmlns:mv="urn:schemas-microsoft-com:mac:vml" xmlns:p="http://schemas.openxmlformats.org/presentationml/2006/main" xmlns:c="http://schemas.openxmlformats.org/drawingml/2006/chart" xmlns:dgm="http://schemas.openxmlformats.org/drawingml/2006/diagram" xmlns:o="urn:schemas-microsoft-com:office:office" xmlns:v="urn:schemas-microsoft-com:vml" xmlns:pvml="urn:schemas-microsoft-com:office:powerpoint" xmlns:com="http://schemas.openxmlformats.org/drawingml/2006/compatibility" xmlns:p14="http://schemas.microsoft.com/office/powerpoint/2010/main" xmlns:p15="http://schemas.microsoft.com/office/powerpoint/2012/main" xmlns:ahyp="http://schemas.microsoft.com/office/drawing/2018/hyperlinkcolor">
+  <p:cSld>
+    <p:spTree>
+      <p:nvGrpSpPr>
+        <p:cNvPr id="357" name="Shape 357"/>
+        <p:cNvGrpSpPr/>
+        <p:nvPr/>
+      </p:nvGrpSpPr>
+      <p:grpSpPr>
+        <a:xfrm>
+          <a:off x="0" y="0"/>
+          <a:ext cx="0" cy="0"/>
+          <a:chOff x="0" y="0"/>
+          <a:chExt cx="0" cy="0"/>
+        </a:xfrm>
+      </p:grpSpPr>
+      <p:sp>
+        <p:nvSpPr>
+          <p:cNvPr id="358" name="Google Shape;358;p51"/>
+          <p:cNvSpPr txBox="1"/>
+          <p:nvPr>
+            <p:ph type="title"/>
+          </p:nvPr>
+        </p:nvSpPr>
+        <p:spPr>
+          <a:xfrm>
+            <a:off x="0" y="-7"/>
+            <a:ext cx="9144000" cy="2386500"/>
+          </a:xfrm>
+          <a:prstGeom prst="rect">
+            <a:avLst/>
+          </a:prstGeom>
+        </p:spPr>
+        <p:txBody>
+          <a:bodyPr anchorCtr="0" anchor="b" bIns="274300" lIns="91425" spcFirstLastPara="1" rIns="91425" wrap="square" tIns="91425">
+            <a:noAutofit/>
+          </a:bodyPr>
+          <a:lstStyle/>
+          <a:p>
+            <a:pPr indent="0" lvl="0" marL="0" rtl="0" algn="ctr">
+              <a:spcBef>
+                <a:spcPts val="0"/>
+              </a:spcBef>
+              <a:spcAft>
+                <a:spcPts val="0"/>
+              </a:spcAft>
+              <a:buNone/>
+            </a:pPr>
+            <a:r>
+              <a:rPr lang="en"/>
+              <a:t>4. Software Architecture</a:t>
+            </a:r>
+            <a:endParaRPr/>
           </a:p>
         </p:txBody>
       </p:sp>
@@ -24138,7 +24185,7 @@
           </a:prstGeom>
         </p:spPr>
         <p:txBody>
-          <a:bodyPr anchorCtr="0" anchor="ctr" bIns="0" lIns="274300" spcFirstLastPara="1" rIns="0" wrap="square" tIns="0">
+          <a:bodyPr anchorCtr="0" anchor="ctr" bIns="91425" lIns="274300" spcFirstLastPara="1" rIns="91425" wrap="square" tIns="91425">
             <a:noAutofit/>
           </a:bodyPr>
           <a:lstStyle/>
@@ -24154,7 +24201,7 @@
             </a:pPr>
             <a:r>
               <a:rPr lang="en"/>
-              <a:t>Runtime Architecture</a:t>
+              <a:t>Agile Architecture?!</a:t>
             </a:r>
             <a:endParaRPr/>
           </a:p>
@@ -24163,6 +24210,180 @@
       <p:sp>
         <p:nvSpPr>
           <p:cNvPr id="364" name="Google Shape;364;p52"/>
+          <p:cNvSpPr txBox="1"/>
+          <p:nvPr>
+            <p:ph idx="1" type="body"/>
+          </p:nvPr>
+        </p:nvSpPr>
+        <p:spPr>
+          <a:xfrm>
+            <a:off x="274320" y="914400"/>
+            <a:ext cx="8595300" cy="4114800"/>
+          </a:xfrm>
+          <a:prstGeom prst="rect">
+            <a:avLst/>
+          </a:prstGeom>
+        </p:spPr>
+        <p:txBody>
+          <a:bodyPr anchorCtr="0" anchor="t" bIns="0" lIns="0" spcFirstLastPara="1" rIns="0" wrap="square" tIns="0">
+            <a:noAutofit/>
+          </a:bodyPr>
+          <a:lstStyle/>
+          <a:p>
+            <a:pPr indent="0" lvl="0" marL="0" rtl="0" algn="l">
+              <a:spcBef>
+                <a:spcPts val="0"/>
+              </a:spcBef>
+              <a:spcAft>
+                <a:spcPts val="0"/>
+              </a:spcAft>
+              <a:buNone/>
+            </a:pPr>
+            <a:r>
+              <a:rPr lang="en"/>
+              <a:t>Agile methods eschew detailed planning</a:t>
+            </a:r>
+            <a:endParaRPr/>
+          </a:p>
+          <a:p>
+            <a:pPr indent="-342900" lvl="0" marL="457200" rtl="0" algn="l">
+              <a:spcBef>
+                <a:spcPts val="1200"/>
+              </a:spcBef>
+              <a:spcAft>
+                <a:spcPts val="0"/>
+              </a:spcAft>
+              <a:buSzPts val="1800"/>
+              <a:buChar char="●"/>
+            </a:pPr>
+            <a:r>
+              <a:rPr lang="en"/>
+              <a:t>The proof of the software is in the feedback of the customer</a:t>
+            </a:r>
+            <a:endParaRPr/>
+          </a:p>
+          <a:p>
+            <a:pPr indent="0" lvl="0" marL="0" rtl="0" algn="l">
+              <a:spcBef>
+                <a:spcPts val="1200"/>
+              </a:spcBef>
+              <a:spcAft>
+                <a:spcPts val="0"/>
+              </a:spcAft>
+              <a:buNone/>
+            </a:pPr>
+            <a:r>
+              <a:rPr lang="en"/>
+              <a:t>Software architecture is the overall design of a system</a:t>
+            </a:r>
+            <a:endParaRPr/>
+          </a:p>
+          <a:p>
+            <a:pPr indent="-342900" lvl="0" marL="457200" rtl="0" algn="l">
+              <a:spcBef>
+                <a:spcPts val="1200"/>
+              </a:spcBef>
+              <a:spcAft>
+                <a:spcPts val="0"/>
+              </a:spcAft>
+              <a:buSzPts val="1800"/>
+              <a:buChar char="●"/>
+            </a:pPr>
+            <a:r>
+              <a:rPr lang="en"/>
+              <a:t>Including static (structural) and dynamic aspects</a:t>
+            </a:r>
+            <a:endParaRPr/>
+          </a:p>
+          <a:p>
+            <a:pPr indent="-342900" lvl="0" marL="457200" rtl="0" algn="l">
+              <a:spcBef>
+                <a:spcPts val="0"/>
+              </a:spcBef>
+              <a:spcAft>
+                <a:spcPts val="0"/>
+              </a:spcAft>
+              <a:buSzPts val="1800"/>
+              <a:buChar char="●"/>
+            </a:pPr>
+            <a:r>
+              <a:rPr lang="en"/>
+              <a:t>Covering everything of wide impact to the system</a:t>
+            </a:r>
+            <a:endParaRPr/>
+          </a:p>
+          <a:p>
+            <a:pPr indent="-342900" lvl="0" marL="457200" rtl="0" algn="l">
+              <a:spcBef>
+                <a:spcPts val="0"/>
+              </a:spcBef>
+              <a:spcAft>
+                <a:spcPts val="0"/>
+              </a:spcAft>
+              <a:buSzPts val="1800"/>
+              <a:buChar char="●"/>
+            </a:pPr>
+            <a:r>
+              <a:rPr lang="en"/>
+              <a:t>Ignoring everything with limited (localized) impact</a:t>
+            </a:r>
+            <a:endParaRPr/>
+          </a:p>
+          <a:p>
+            <a:pPr indent="0" lvl="0" marL="0" rtl="0" algn="l">
+              <a:spcBef>
+                <a:spcPts val="1200"/>
+              </a:spcBef>
+              <a:spcAft>
+                <a:spcPts val="0"/>
+              </a:spcAft>
+              <a:buNone/>
+            </a:pPr>
+            <a:r>
+              <a:rPr lang="en"/>
+              <a:t>Agile software architecture is software architecture that</a:t>
+            </a:r>
+            <a:endParaRPr/>
+          </a:p>
+          <a:p>
+            <a:pPr indent="-342900" lvl="0" marL="457200" rtl="0" algn="l">
+              <a:spcBef>
+                <a:spcPts val="1200"/>
+              </a:spcBef>
+              <a:spcAft>
+                <a:spcPts val="0"/>
+              </a:spcAft>
+              <a:buSzPts val="1800"/>
+              <a:buChar char="●"/>
+            </a:pPr>
+            <a:r>
+              <a:rPr lang="en"/>
+              <a:t>Emerges from risk-adjusted planning / visibility</a:t>
+            </a:r>
+            <a:endParaRPr/>
+          </a:p>
+          <a:p>
+            <a:pPr indent="-342900" lvl="0" marL="457200" rtl="0" algn="l">
+              <a:spcBef>
+                <a:spcPts val="0"/>
+              </a:spcBef>
+              <a:spcAft>
+                <a:spcPts val="0"/>
+              </a:spcAft>
+              <a:buSzPts val="1800"/>
+              <a:buChar char="●"/>
+            </a:pPr>
+            <a:r>
+              <a:rPr lang="en"/>
+              <a:t>Delays architectural investment to the last minute</a:t>
+            </a:r>
+            <a:endParaRPr/>
+          </a:p>
+        </p:txBody>
+      </p:sp>
+      <p:sp>
+        <p:nvSpPr>
+          <p:cNvPr id="365" name="Google Shape;365;p52"/>
           <p:cNvSpPr txBox="1"/>
           <p:nvPr>
             <p:ph idx="12" type="sldNum"/>
@@ -24229,38 +24450,10 @@
               <a:rPr b="0" lang="en" sz="900"/>
               <a:t> </a:t>
             </a:r>
-            <a:endParaRPr/>
+            <a:endParaRPr b="0" sz="900"/>
           </a:p>
         </p:txBody>
       </p:sp>
-      <p:pic>
-        <p:nvPicPr>
-          <p:cNvPr id="365" name="Google Shape;365;p52"/>
-          <p:cNvPicPr preferRelativeResize="0"/>
-          <p:nvPr/>
-        </p:nvPicPr>
-        <p:blipFill>
-          <a:blip r:embed="rId4">
-            <a:alphaModFix/>
-          </a:blip>
-          <a:stretch>
-            <a:fillRect/>
-          </a:stretch>
-        </p:blipFill>
-        <p:spPr>
-          <a:xfrm>
-            <a:off x="0" y="731520"/>
-            <a:ext cx="9144001" cy="3931920"/>
-          </a:xfrm>
-          <a:prstGeom prst="rect">
-            <a:avLst/>
-          </a:prstGeom>
-          <a:noFill/>
-          <a:ln>
-            <a:noFill/>
-          </a:ln>
-        </p:spPr>
-      </p:pic>
     </p:spTree>
   </p:cSld>
   <p:clrMapOvr>
@@ -24320,7 +24513,7 @@
             </a:pPr>
             <a:r>
               <a:rPr lang="en"/>
-              <a:t>Objects at Runtime</a:t>
+              <a:t>Runtime Architecture</a:t>
             </a:r>
             <a:endParaRPr/>
           </a:p>
@@ -24551,7 +24744,7 @@
             </a:pPr>
             <a:r>
               <a:rPr lang="en"/>
-              <a:t>Code Organization</a:t>
+              <a:t>Objects at Runtime</a:t>
             </a:r>
             <a:endParaRPr/>
           </a:p>
@@ -24701,7 +24894,7 @@
           </a:prstGeom>
         </p:spPr>
         <p:txBody>
-          <a:bodyPr anchorCtr="0" anchor="ctr" bIns="91425" lIns="274300" spcFirstLastPara="1" rIns="91425" wrap="square" tIns="91425">
+          <a:bodyPr anchorCtr="0" anchor="ctr" bIns="0" lIns="274300" spcFirstLastPara="1" rIns="0" wrap="square" tIns="0">
             <a:noAutofit/>
           </a:bodyPr>
           <a:lstStyle/>
@@ -24717,7 +24910,7 @@
             </a:pPr>
             <a:r>
               <a:rPr lang="en"/>
-              <a:t>One-time Deliverable: Architecture Description</a:t>
+              <a:t>Code Organization</a:t>
             </a:r>
             <a:endParaRPr/>
           </a:p>
@@ -24726,128 +24919,6 @@
       <p:sp>
         <p:nvSpPr>
           <p:cNvPr id="385" name="Google Shape;385;p55"/>
-          <p:cNvSpPr txBox="1"/>
-          <p:nvPr>
-            <p:ph idx="1" type="body"/>
-          </p:nvPr>
-        </p:nvSpPr>
-        <p:spPr>
-          <a:xfrm>
-            <a:off x="274320" y="914400"/>
-            <a:ext cx="8595300" cy="4114800"/>
-          </a:xfrm>
-          <a:prstGeom prst="rect">
-            <a:avLst/>
-          </a:prstGeom>
-        </p:spPr>
-        <p:txBody>
-          <a:bodyPr anchorCtr="0" anchor="t" bIns="0" lIns="0" spcFirstLastPara="1" rIns="0" wrap="square" tIns="0">
-            <a:noAutofit/>
-          </a:bodyPr>
-          <a:lstStyle/>
-          <a:p>
-            <a:pPr indent="0" lvl="0" marL="0" rtl="0" algn="l">
-              <a:spcBef>
-                <a:spcPts val="0"/>
-              </a:spcBef>
-              <a:spcAft>
-                <a:spcPts val="0"/>
-              </a:spcAft>
-              <a:buNone/>
-            </a:pPr>
-            <a:r>
-              <a:rPr lang="en"/>
-              <a:t>Provide a description of the initial planned architecture including (at a minimum)</a:t>
-            </a:r>
-            <a:endParaRPr/>
-          </a:p>
-          <a:p>
-            <a:pPr indent="-342900" lvl="0" marL="457200" rtl="0" algn="l">
-              <a:spcBef>
-                <a:spcPts val="1200"/>
-              </a:spcBef>
-              <a:spcAft>
-                <a:spcPts val="0"/>
-              </a:spcAft>
-              <a:buSzPts val="1800"/>
-              <a:buAutoNum type="arabicPeriod"/>
-            </a:pPr>
-            <a:r>
-              <a:rPr lang="en"/>
-              <a:t>The runtime architecture</a:t>
-            </a:r>
-            <a:endParaRPr/>
-          </a:p>
-          <a:p>
-            <a:pPr indent="-342900" lvl="0" marL="457200" rtl="0" algn="l">
-              <a:spcBef>
-                <a:spcPts val="0"/>
-              </a:spcBef>
-              <a:spcAft>
-                <a:spcPts val="0"/>
-              </a:spcAft>
-              <a:buSzPts val="1800"/>
-              <a:buAutoNum type="arabicPeriod"/>
-            </a:pPr>
-            <a:r>
-              <a:rPr lang="en"/>
-              <a:t>The (static) code organization</a:t>
-            </a:r>
-            <a:endParaRPr/>
-          </a:p>
-          <a:p>
-            <a:pPr indent="-342900" lvl="0" marL="457200" rtl="0" algn="l">
-              <a:spcBef>
-                <a:spcPts val="0"/>
-              </a:spcBef>
-              <a:spcAft>
-                <a:spcPts val="0"/>
-              </a:spcAft>
-              <a:buSzPts val="1800"/>
-              <a:buAutoNum type="arabicPeriod"/>
-            </a:pPr>
-            <a:r>
-              <a:rPr lang="en"/>
-              <a:t>The tech stack you are building on</a:t>
-            </a:r>
-            <a:endParaRPr/>
-          </a:p>
-          <a:p>
-            <a:pPr indent="0" lvl="0" marL="0" rtl="0" algn="l">
-              <a:spcBef>
-                <a:spcPts val="1200"/>
-              </a:spcBef>
-              <a:spcAft>
-                <a:spcPts val="0"/>
-              </a:spcAft>
-              <a:buNone/>
-            </a:pPr>
-            <a:r>
-              <a:rPr lang="en"/>
-              <a:t>Feel free at the end of the project to review planning with reality</a:t>
-            </a:r>
-            <a:endParaRPr/>
-          </a:p>
-          <a:p>
-            <a:pPr indent="0" lvl="0" marL="0" rtl="0" algn="l">
-              <a:spcBef>
-                <a:spcPts val="1200"/>
-              </a:spcBef>
-              <a:spcAft>
-                <a:spcPts val="1200"/>
-              </a:spcAft>
-              <a:buNone/>
-            </a:pPr>
-            <a:r>
-              <a:t/>
-            </a:r>
-            <a:endParaRPr/>
-          </a:p>
-        </p:txBody>
-      </p:sp>
-      <p:sp>
-        <p:nvSpPr>
-          <p:cNvPr id="386" name="Google Shape;386;p55"/>
           <p:cNvSpPr txBox="1"/>
           <p:nvPr>
             <p:ph idx="12" type="sldNum"/>
@@ -24914,10 +24985,38 @@
               <a:rPr b="0" lang="en" sz="900"/>
               <a:t> </a:t>
             </a:r>
-            <a:endParaRPr b="0" sz="900"/>
+            <a:endParaRPr/>
           </a:p>
         </p:txBody>
       </p:sp>
+      <p:pic>
+        <p:nvPicPr>
+          <p:cNvPr id="386" name="Google Shape;386;p55"/>
+          <p:cNvPicPr preferRelativeResize="0"/>
+          <p:nvPr/>
+        </p:nvPicPr>
+        <p:blipFill>
+          <a:blip r:embed="rId4">
+            <a:alphaModFix/>
+          </a:blip>
+          <a:stretch>
+            <a:fillRect/>
+          </a:stretch>
+        </p:blipFill>
+        <p:spPr>
+          <a:xfrm>
+            <a:off x="0" y="731520"/>
+            <a:ext cx="9144001" cy="3931920"/>
+          </a:xfrm>
+          <a:prstGeom prst="rect">
+            <a:avLst/>
+          </a:prstGeom>
+          <a:noFill/>
+          <a:ln>
+            <a:noFill/>
+          </a:ln>
+        </p:spPr>
+      </p:pic>
     </p:spTree>
   </p:cSld>
   <p:clrMapOvr>
@@ -24977,7 +25076,7 @@
             </a:pPr>
             <a:r>
               <a:rPr lang="en"/>
-              <a:t>Summary</a:t>
+              <a:t>One-time Deliverable: Architecture Description</a:t>
             </a:r>
             <a:endParaRPr/>
           </a:p>
@@ -25006,9 +25105,25 @@
           </a:bodyPr>
           <a:lstStyle/>
           <a:p>
+            <a:pPr indent="0" lvl="0" marL="0" rtl="0" algn="l">
+              <a:spcBef>
+                <a:spcPts val="0"/>
+              </a:spcBef>
+              <a:spcAft>
+                <a:spcPts val="0"/>
+              </a:spcAft>
+              <a:buNone/>
+            </a:pPr>
+            <a:r>
+              <a:rPr lang="en"/>
+              <a:t>Provide a description of the initial planned architecture including (at a minimum)</a:t>
+            </a:r>
+            <a:endParaRPr/>
+          </a:p>
+          <a:p>
             <a:pPr indent="-342900" lvl="0" marL="457200" rtl="0" algn="l">
               <a:spcBef>
-                <a:spcPts val="0"/>
+                <a:spcPts val="1200"/>
               </a:spcBef>
               <a:spcAft>
                 <a:spcPts val="0"/>
@@ -25018,7 +25133,7 @@
             </a:pPr>
             <a:r>
               <a:rPr lang="en"/>
-              <a:t>The AMOS process</a:t>
+              <a:t>The runtime architecture</a:t>
             </a:r>
             <a:endParaRPr/>
           </a:p>
@@ -25035,99 +25150,14 @@
             </a:pPr>
             <a:r>
               <a:rPr lang="en"/>
-              <a:t>The team meeting</a:t>
+              <a:t>The (static) code organization</a:t>
             </a:r>
             <a:endParaRPr/>
           </a:p>
           <a:p>
-            <a:pPr indent="-317500" lvl="1" marL="914400" rtl="0" algn="l">
-              <a:spcBef>
-                <a:spcPts val="0"/>
-              </a:spcBef>
-              <a:spcAft>
-                <a:spcPts val="0"/>
-              </a:spcAft>
-              <a:buSzPts val="1400"/>
-              <a:buChar char="○"/>
-            </a:pPr>
-            <a:r>
-              <a:rPr lang="en"/>
-              <a:t>Meeting preparation</a:t>
-            </a:r>
-            <a:endParaRPr/>
-          </a:p>
-          <a:p>
-            <a:pPr indent="-317500" lvl="1" marL="914400" rtl="0" algn="l">
-              <a:spcBef>
-                <a:spcPts val="0"/>
-              </a:spcBef>
-              <a:spcAft>
-                <a:spcPts val="0"/>
-              </a:spcAft>
-              <a:buSzPts val="1400"/>
-              <a:buChar char="○"/>
-            </a:pPr>
-            <a:r>
-              <a:rPr lang="en"/>
-              <a:t>Sprint review</a:t>
-            </a:r>
-            <a:endParaRPr/>
-          </a:p>
-          <a:p>
-            <a:pPr indent="-317500" lvl="1" marL="914400" rtl="0" algn="l">
-              <a:spcBef>
-                <a:spcPts val="0"/>
-              </a:spcBef>
-              <a:spcAft>
-                <a:spcPts val="0"/>
-              </a:spcAft>
-              <a:buSzPts val="1400"/>
-              <a:buChar char="○"/>
-            </a:pPr>
-            <a:r>
-              <a:rPr lang="en"/>
-              <a:t>Sprint release</a:t>
-            </a:r>
-            <a:endParaRPr/>
-          </a:p>
-          <a:p>
-            <a:pPr indent="-317500" lvl="1" marL="914400" rtl="0" algn="l">
-              <a:spcBef>
-                <a:spcPts val="0"/>
-              </a:spcBef>
-              <a:spcAft>
-                <a:spcPts val="0"/>
-              </a:spcAft>
-              <a:buSzPts val="1400"/>
-              <a:buChar char="○"/>
-            </a:pPr>
-            <a:r>
-              <a:rPr lang="en"/>
-              <a:t>Sprint retrospective</a:t>
-            </a:r>
-            <a:endParaRPr/>
-          </a:p>
-          <a:p>
-            <a:pPr indent="-317500" lvl="1" marL="914400" rtl="0" algn="l">
-              <a:spcBef>
-                <a:spcPts val="0"/>
-              </a:spcBef>
-              <a:spcAft>
-                <a:spcPts val="0"/>
-              </a:spcAft>
-              <a:buSzPts val="1400"/>
-              <a:buChar char="○"/>
-            </a:pPr>
-            <a:r>
-              <a:rPr lang="en"/>
-              <a:t>Sprint planning</a:t>
-            </a:r>
-            <a:endParaRPr/>
-          </a:p>
-          <a:p>
             <a:pPr indent="-342900" lvl="0" marL="457200" rtl="0" algn="l">
               <a:spcBef>
-                <a:spcPts val="1000"/>
+                <a:spcPts val="0"/>
               </a:spcBef>
               <a:spcAft>
                 <a:spcPts val="0"/>
@@ -25137,24 +25167,38 @@
             </a:pPr>
             <a:r>
               <a:rPr lang="en"/>
-              <a:t>Software bill of materials</a:t>
+              <a:t>The tech stack you are building on</a:t>
             </a:r>
             <a:endParaRPr/>
           </a:p>
           <a:p>
-            <a:pPr indent="-342900" lvl="0" marL="457200" rtl="0" algn="l">
-              <a:spcBef>
-                <a:spcPts val="0"/>
-              </a:spcBef>
-              <a:spcAft>
-                <a:spcPts val="0"/>
-              </a:spcAft>
-              <a:buSzPts val="1800"/>
-              <a:buAutoNum type="arabicPeriod"/>
+            <a:pPr indent="0" lvl="0" marL="0" rtl="0" algn="l">
+              <a:spcBef>
+                <a:spcPts val="1200"/>
+              </a:spcBef>
+              <a:spcAft>
+                <a:spcPts val="0"/>
+              </a:spcAft>
+              <a:buNone/>
             </a:pPr>
             <a:r>
               <a:rPr lang="en"/>
-              <a:t>Software architecture</a:t>
+              <a:t>Feel free at the end of the project to review planning with reality</a:t>
+            </a:r>
+            <a:endParaRPr/>
+          </a:p>
+          <a:p>
+            <a:pPr indent="0" lvl="0" marL="0" rtl="0" algn="l">
+              <a:spcBef>
+                <a:spcPts val="1200"/>
+              </a:spcBef>
+              <a:spcAft>
+                <a:spcPts val="1200"/>
+              </a:spcAft>
+              <a:buNone/>
+            </a:pPr>
+            <a:r>
+              <a:t/>
             </a:r>
             <a:endParaRPr/>
           </a:p>
@@ -25263,6 +25307,321 @@
           <p:cNvPr id="398" name="Google Shape;398;p57"/>
           <p:cNvSpPr txBox="1"/>
           <p:nvPr>
+            <p:ph type="title"/>
+          </p:nvPr>
+        </p:nvSpPr>
+        <p:spPr>
+          <a:xfrm>
+            <a:off x="0" y="0"/>
+            <a:ext cx="9144000" cy="685800"/>
+          </a:xfrm>
+          <a:prstGeom prst="rect">
+            <a:avLst/>
+          </a:prstGeom>
+        </p:spPr>
+        <p:txBody>
+          <a:bodyPr anchorCtr="0" anchor="ctr" bIns="91425" lIns="274300" spcFirstLastPara="1" rIns="91425" wrap="square" tIns="91425">
+            <a:noAutofit/>
+          </a:bodyPr>
+          <a:lstStyle/>
+          <a:p>
+            <a:pPr indent="0" lvl="0" marL="0" rtl="0" algn="l">
+              <a:spcBef>
+                <a:spcPts val="0"/>
+              </a:spcBef>
+              <a:spcAft>
+                <a:spcPts val="0"/>
+              </a:spcAft>
+              <a:buNone/>
+            </a:pPr>
+            <a:r>
+              <a:rPr lang="en"/>
+              <a:t>Summary</a:t>
+            </a:r>
+            <a:endParaRPr/>
+          </a:p>
+        </p:txBody>
+      </p:sp>
+      <p:sp>
+        <p:nvSpPr>
+          <p:cNvPr id="399" name="Google Shape;399;p57"/>
+          <p:cNvSpPr txBox="1"/>
+          <p:nvPr>
+            <p:ph idx="1" type="body"/>
+          </p:nvPr>
+        </p:nvSpPr>
+        <p:spPr>
+          <a:xfrm>
+            <a:off x="274320" y="914400"/>
+            <a:ext cx="8595300" cy="4114800"/>
+          </a:xfrm>
+          <a:prstGeom prst="rect">
+            <a:avLst/>
+          </a:prstGeom>
+        </p:spPr>
+        <p:txBody>
+          <a:bodyPr anchorCtr="0" anchor="t" bIns="0" lIns="0" spcFirstLastPara="1" rIns="0" wrap="square" tIns="0">
+            <a:noAutofit/>
+          </a:bodyPr>
+          <a:lstStyle/>
+          <a:p>
+            <a:pPr indent="-342900" lvl="0" marL="457200" rtl="0" algn="l">
+              <a:spcBef>
+                <a:spcPts val="0"/>
+              </a:spcBef>
+              <a:spcAft>
+                <a:spcPts val="0"/>
+              </a:spcAft>
+              <a:buSzPts val="1800"/>
+              <a:buAutoNum type="arabicPeriod"/>
+            </a:pPr>
+            <a:r>
+              <a:rPr lang="en"/>
+              <a:t>The AMOS process</a:t>
+            </a:r>
+            <a:endParaRPr/>
+          </a:p>
+          <a:p>
+            <a:pPr indent="-342900" lvl="0" marL="457200" rtl="0" algn="l">
+              <a:spcBef>
+                <a:spcPts val="0"/>
+              </a:spcBef>
+              <a:spcAft>
+                <a:spcPts val="0"/>
+              </a:spcAft>
+              <a:buSzPts val="1800"/>
+              <a:buAutoNum type="arabicPeriod"/>
+            </a:pPr>
+            <a:r>
+              <a:rPr lang="en"/>
+              <a:t>The team meeting</a:t>
+            </a:r>
+            <a:endParaRPr/>
+          </a:p>
+          <a:p>
+            <a:pPr indent="-317500" lvl="1" marL="914400" rtl="0" algn="l">
+              <a:spcBef>
+                <a:spcPts val="0"/>
+              </a:spcBef>
+              <a:spcAft>
+                <a:spcPts val="0"/>
+              </a:spcAft>
+              <a:buSzPts val="1400"/>
+              <a:buChar char="○"/>
+            </a:pPr>
+            <a:r>
+              <a:rPr lang="en"/>
+              <a:t>Meeting preparation</a:t>
+            </a:r>
+            <a:endParaRPr/>
+          </a:p>
+          <a:p>
+            <a:pPr indent="-317500" lvl="1" marL="914400" rtl="0" algn="l">
+              <a:spcBef>
+                <a:spcPts val="0"/>
+              </a:spcBef>
+              <a:spcAft>
+                <a:spcPts val="0"/>
+              </a:spcAft>
+              <a:buSzPts val="1400"/>
+              <a:buChar char="○"/>
+            </a:pPr>
+            <a:r>
+              <a:rPr lang="en"/>
+              <a:t>Sprint review</a:t>
+            </a:r>
+            <a:endParaRPr/>
+          </a:p>
+          <a:p>
+            <a:pPr indent="-317500" lvl="1" marL="914400" rtl="0" algn="l">
+              <a:spcBef>
+                <a:spcPts val="0"/>
+              </a:spcBef>
+              <a:spcAft>
+                <a:spcPts val="0"/>
+              </a:spcAft>
+              <a:buSzPts val="1400"/>
+              <a:buChar char="○"/>
+            </a:pPr>
+            <a:r>
+              <a:rPr lang="en"/>
+              <a:t>Sprint release</a:t>
+            </a:r>
+            <a:endParaRPr/>
+          </a:p>
+          <a:p>
+            <a:pPr indent="-317500" lvl="1" marL="914400" rtl="0" algn="l">
+              <a:spcBef>
+                <a:spcPts val="0"/>
+              </a:spcBef>
+              <a:spcAft>
+                <a:spcPts val="0"/>
+              </a:spcAft>
+              <a:buSzPts val="1400"/>
+              <a:buChar char="○"/>
+            </a:pPr>
+            <a:r>
+              <a:rPr lang="en"/>
+              <a:t>Sprint retrospective</a:t>
+            </a:r>
+            <a:endParaRPr/>
+          </a:p>
+          <a:p>
+            <a:pPr indent="-317500" lvl="1" marL="914400" rtl="0" algn="l">
+              <a:spcBef>
+                <a:spcPts val="0"/>
+              </a:spcBef>
+              <a:spcAft>
+                <a:spcPts val="0"/>
+              </a:spcAft>
+              <a:buSzPts val="1400"/>
+              <a:buChar char="○"/>
+            </a:pPr>
+            <a:r>
+              <a:rPr lang="en"/>
+              <a:t>Sprint planning</a:t>
+            </a:r>
+            <a:endParaRPr/>
+          </a:p>
+          <a:p>
+            <a:pPr indent="-342900" lvl="0" marL="457200" rtl="0" algn="l">
+              <a:spcBef>
+                <a:spcPts val="1000"/>
+              </a:spcBef>
+              <a:spcAft>
+                <a:spcPts val="0"/>
+              </a:spcAft>
+              <a:buSzPts val="1800"/>
+              <a:buAutoNum type="arabicPeriod"/>
+            </a:pPr>
+            <a:r>
+              <a:rPr lang="en"/>
+              <a:t>Software bill of materials</a:t>
+            </a:r>
+            <a:endParaRPr/>
+          </a:p>
+          <a:p>
+            <a:pPr indent="-342900" lvl="0" marL="457200" rtl="0" algn="l">
+              <a:spcBef>
+                <a:spcPts val="0"/>
+              </a:spcBef>
+              <a:spcAft>
+                <a:spcPts val="0"/>
+              </a:spcAft>
+              <a:buSzPts val="1800"/>
+              <a:buAutoNum type="arabicPeriod"/>
+            </a:pPr>
+            <a:r>
+              <a:rPr lang="en"/>
+              <a:t>Software architecture</a:t>
+            </a:r>
+            <a:endParaRPr/>
+          </a:p>
+        </p:txBody>
+      </p:sp>
+      <p:sp>
+        <p:nvSpPr>
+          <p:cNvPr id="400" name="Google Shape;400;p57"/>
+          <p:cNvSpPr txBox="1"/>
+          <p:nvPr>
+            <p:ph idx="12" type="sldNum"/>
+          </p:nvPr>
+        </p:nvSpPr>
+        <p:spPr>
+          <a:xfrm>
+            <a:off x="7315202" y="4416550"/>
+            <a:ext cx="1828800" cy="731400"/>
+          </a:xfrm>
+          <a:prstGeom prst="rect">
+            <a:avLst/>
+          </a:prstGeom>
+        </p:spPr>
+        <p:txBody>
+          <a:bodyPr anchorCtr="0" anchor="b" bIns="91425" lIns="91425" spcFirstLastPara="1" rIns="91425" wrap="square" tIns="91425">
+            <a:noAutofit/>
+          </a:bodyPr>
+          <a:lstStyle/>
+          <a:p>
+            <a:pPr indent="0" lvl="0" marL="0" rtl="0" algn="r">
+              <a:spcBef>
+                <a:spcPts val="0"/>
+              </a:spcBef>
+              <a:spcAft>
+                <a:spcPts val="0"/>
+              </a:spcAft>
+              <a:buNone/>
+            </a:pPr>
+            <a:fld id="{00000000-1234-1234-1234-123412341234}" type="slidenum">
+              <a:rPr lang="en">
+                <a:solidFill>
+                  <a:schemeClr val="dk1"/>
+                </a:solidFill>
+              </a:rPr>
+              <a:t>‹#›</a:t>
+            </a:fld>
+            <a:endParaRPr>
+              <a:solidFill>
+                <a:schemeClr val="dk1"/>
+              </a:solidFill>
+            </a:endParaRPr>
+          </a:p>
+          <a:p>
+            <a:pPr indent="0" lvl="0" marL="0" rtl="0" algn="r">
+              <a:spcBef>
+                <a:spcPts val="0"/>
+              </a:spcBef>
+              <a:spcAft>
+                <a:spcPts val="0"/>
+              </a:spcAft>
+              <a:buNone/>
+            </a:pPr>
+            <a:r>
+              <a:rPr b="0" lang="en" sz="900" u="sng">
+                <a:solidFill>
+                  <a:schemeClr val="hlink"/>
+                </a:solidFill>
+                <a:hlinkClick r:id="rId3"/>
+              </a:rPr>
+              <a:t>https://oss.cs.fau.de</a:t>
+            </a:r>
+            <a:r>
+              <a:rPr b="0" lang="en" sz="900"/>
+              <a:t> </a:t>
+            </a:r>
+            <a:endParaRPr b="0" sz="900"/>
+          </a:p>
+        </p:txBody>
+      </p:sp>
+    </p:spTree>
+  </p:cSld>
+  <p:clrMapOvr>
+    <a:masterClrMapping/>
+  </p:clrMapOvr>
+</p:sld>
+</file>
+
+<file path=ppt/slides/slide44.xml><?xml version="1.0" encoding="utf-8"?>
+<p:sld xmlns:a="http://schemas.openxmlformats.org/drawingml/2006/main" xmlns:r="http://schemas.openxmlformats.org/officeDocument/2006/relationships" xmlns:mc="http://schemas.openxmlformats.org/markup-compatibility/2006" xmlns:mv="urn:schemas-microsoft-com:mac:vml" xmlns:p="http://schemas.openxmlformats.org/presentationml/2006/main" xmlns:c="http://schemas.openxmlformats.org/drawingml/2006/chart" xmlns:dgm="http://schemas.openxmlformats.org/drawingml/2006/diagram" xmlns:o="urn:schemas-microsoft-com:office:office" xmlns:v="urn:schemas-microsoft-com:vml" xmlns:pvml="urn:schemas-microsoft-com:office:powerpoint" xmlns:com="http://schemas.openxmlformats.org/drawingml/2006/compatibility" xmlns:p14="http://schemas.microsoft.com/office/powerpoint/2010/main" xmlns:p15="http://schemas.microsoft.com/office/powerpoint/2012/main" xmlns:ahyp="http://schemas.microsoft.com/office/drawing/2018/hyperlinkcolor">
+  <p:cSld>
+    <p:spTree>
+      <p:nvGrpSpPr>
+        <p:cNvPr id="404" name="Shape 404"/>
+        <p:cNvGrpSpPr/>
+        <p:nvPr/>
+      </p:nvGrpSpPr>
+      <p:grpSpPr>
+        <a:xfrm>
+          <a:off x="0" y="0"/>
+          <a:ext cx="0" cy="0"/>
+          <a:chOff x="0" y="0"/>
+          <a:chExt cx="0" cy="0"/>
+        </a:xfrm>
+      </p:grpSpPr>
+      <p:sp>
+        <p:nvSpPr>
+          <p:cNvPr id="405" name="Google Shape;405;p58"/>
+          <p:cNvSpPr txBox="1"/>
+          <p:nvPr>
             <p:ph type="ctrTitle"/>
           </p:nvPr>
         </p:nvSpPr>
@@ -25300,7 +25659,7 @@
       </p:sp>
       <p:sp>
         <p:nvSpPr>
-          <p:cNvPr id="399" name="Google Shape;399;p57"/>
+          <p:cNvPr id="406" name="Google Shape;406;p58"/>
           <p:cNvSpPr txBox="1"/>
           <p:nvPr>
             <p:ph idx="1" type="subTitle"/>
@@ -25425,12 +25784,12 @@
 </p:sld>
 </file>
 
-<file path=ppt/slides/slide44.xml><?xml version="1.0" encoding="utf-8"?>
+<file path=ppt/slides/slide45.xml><?xml version="1.0" encoding="utf-8"?>
 <p:sld xmlns:a="http://schemas.openxmlformats.org/drawingml/2006/main" xmlns:r="http://schemas.openxmlformats.org/officeDocument/2006/relationships" xmlns:mc="http://schemas.openxmlformats.org/markup-compatibility/2006" xmlns:mv="urn:schemas-microsoft-com:mac:vml" xmlns:p="http://schemas.openxmlformats.org/presentationml/2006/main" xmlns:c="http://schemas.openxmlformats.org/drawingml/2006/chart" xmlns:dgm="http://schemas.openxmlformats.org/drawingml/2006/diagram" xmlns:o="urn:schemas-microsoft-com:office:office" xmlns:v="urn:schemas-microsoft-com:vml" xmlns:pvml="urn:schemas-microsoft-com:office:powerpoint" xmlns:com="http://schemas.openxmlformats.org/drawingml/2006/compatibility" xmlns:p14="http://schemas.microsoft.com/office/powerpoint/2010/main" xmlns:p15="http://schemas.microsoft.com/office/powerpoint/2012/main" xmlns:ahyp="http://schemas.microsoft.com/office/drawing/2018/hyperlinkcolor">
   <p:cSld>
     <p:spTree>
       <p:nvGrpSpPr>
-        <p:cNvPr id="403" name="Shape 403"/>
+        <p:cNvPr id="410" name="Shape 410"/>
         <p:cNvGrpSpPr/>
         <p:nvPr/>
       </p:nvGrpSpPr>
@@ -25444,7 +25803,7 @@
       </p:grpSpPr>
       <p:sp>
         <p:nvSpPr>
-          <p:cNvPr id="404" name="Google Shape;404;p58"/>
+          <p:cNvPr id="411" name="Google Shape;411;p59"/>
           <p:cNvSpPr txBox="1"/>
           <p:nvPr>
             <p:ph type="title"/>
@@ -25484,7 +25843,7 @@
       </p:sp>
       <p:sp>
         <p:nvSpPr>
-          <p:cNvPr id="405" name="Google Shape;405;p58"/>
+          <p:cNvPr id="412" name="Google Shape;412;p59"/>
           <p:cNvSpPr txBox="1"/>
           <p:nvPr>
             <p:ph idx="12" type="sldNum"/>
@@ -25557,7 +25916,7 @@
       </p:sp>
       <p:sp>
         <p:nvSpPr>
-          <p:cNvPr id="406" name="Google Shape;406;p58"/>
+          <p:cNvPr id="413" name="Google Shape;413;p59"/>
           <p:cNvSpPr txBox="1"/>
           <p:nvPr>
             <p:ph idx="1" type="body"/>

--- a/Lecture slides/AMOS B02 - Scrum and AMOS.pptx
+++ b/Lecture slides/AMOS B02 - Scrum and AMOS.pptx
@@ -83,7 +83,7 @@
         <a:srgbClr val="000000"/>
       </a:buClr>
       <a:buFont typeface="Arial"/>
-      <a:defRPr b="0" i="0" sz="1400" u="none" cap="none" strike="noStrike">
+      <a:defRPr b="0" i="0" spc="0" sz="1400" u="none" cap="none" strike="noStrike">
         <a:solidFill>
           <a:srgbClr val="000000"/>
         </a:solidFill>
@@ -107,7 +107,7 @@
         <a:srgbClr val="000000"/>
       </a:buClr>
       <a:buFont typeface="Arial"/>
-      <a:defRPr b="0" i="0" sz="1400" u="none" cap="none" strike="noStrike">
+      <a:defRPr b="0" i="0" spc="0" sz="1400" u="none" cap="none" strike="noStrike">
         <a:solidFill>
           <a:srgbClr val="000000"/>
         </a:solidFill>
@@ -131,7 +131,7 @@
         <a:srgbClr val="000000"/>
       </a:buClr>
       <a:buFont typeface="Arial"/>
-      <a:defRPr b="0" i="0" sz="1400" u="none" cap="none" strike="noStrike">
+      <a:defRPr b="0" i="0" spc="0" sz="1400" u="none" cap="none" strike="noStrike">
         <a:solidFill>
           <a:srgbClr val="000000"/>
         </a:solidFill>
@@ -155,7 +155,7 @@
         <a:srgbClr val="000000"/>
       </a:buClr>
       <a:buFont typeface="Arial"/>
-      <a:defRPr b="0" i="0" sz="1400" u="none" cap="none" strike="noStrike">
+      <a:defRPr b="0" i="0" spc="0" sz="1400" u="none" cap="none" strike="noStrike">
         <a:solidFill>
           <a:srgbClr val="000000"/>
         </a:solidFill>
@@ -179,7 +179,7 @@
         <a:srgbClr val="000000"/>
       </a:buClr>
       <a:buFont typeface="Arial"/>
-      <a:defRPr b="0" i="0" sz="1400" u="none" cap="none" strike="noStrike">
+      <a:defRPr b="0" i="0" spc="0" sz="1400" u="none" cap="none" strike="noStrike">
         <a:solidFill>
           <a:srgbClr val="000000"/>
         </a:solidFill>
@@ -203,7 +203,7 @@
         <a:srgbClr val="000000"/>
       </a:buClr>
       <a:buFont typeface="Arial"/>
-      <a:defRPr b="0" i="0" sz="1400" u="none" cap="none" strike="noStrike">
+      <a:defRPr b="0" i="0" spc="0" sz="1400" u="none" cap="none" strike="noStrike">
         <a:solidFill>
           <a:srgbClr val="000000"/>
         </a:solidFill>
@@ -227,7 +227,7 @@
         <a:srgbClr val="000000"/>
       </a:buClr>
       <a:buFont typeface="Arial"/>
-      <a:defRPr b="0" i="0" sz="1400" u="none" cap="none" strike="noStrike">
+      <a:defRPr b="0" i="0" spc="0" sz="1400" u="none" cap="none" strike="noStrike">
         <a:solidFill>
           <a:srgbClr val="000000"/>
         </a:solidFill>
@@ -251,7 +251,7 @@
         <a:srgbClr val="000000"/>
       </a:buClr>
       <a:buFont typeface="Arial"/>
-      <a:defRPr b="0" i="0" sz="1400" u="none" cap="none" strike="noStrike">
+      <a:defRPr b="0" i="0" spc="0" sz="1400" u="none" cap="none" strike="noStrike">
         <a:solidFill>
           <a:srgbClr val="000000"/>
         </a:solidFill>
@@ -275,7 +275,7 @@
         <a:srgbClr val="000000"/>
       </a:buClr>
       <a:buFont typeface="Arial"/>
-      <a:defRPr b="0" i="0" sz="1400" u="none" cap="none" strike="noStrike">
+      <a:defRPr b="0" i="0" spc="0" sz="1400" u="none" cap="none" strike="noStrike">
         <a:solidFill>
           <a:srgbClr val="000000"/>
         </a:solidFill>
@@ -525,7 +525,7 @@
         <a:srgbClr val="000000"/>
       </a:buClr>
       <a:buFont typeface="Arial"/>
-      <a:defRPr b="0" i="0" sz="1400" u="none" cap="none" strike="noStrike">
+      <a:defRPr b="0" i="0" spc="0" sz="1400" u="none" cap="none" strike="noStrike">
         <a:solidFill>
           <a:srgbClr val="000000"/>
         </a:solidFill>
@@ -549,7 +549,7 @@
         <a:srgbClr val="000000"/>
       </a:buClr>
       <a:buFont typeface="Arial"/>
-      <a:defRPr b="0" i="0" sz="1400" u="none" cap="none" strike="noStrike">
+      <a:defRPr b="0" i="0" spc="0" sz="1400" u="none" cap="none" strike="noStrike">
         <a:solidFill>
           <a:srgbClr val="000000"/>
         </a:solidFill>
@@ -573,7 +573,7 @@
         <a:srgbClr val="000000"/>
       </a:buClr>
       <a:buFont typeface="Arial"/>
-      <a:defRPr b="0" i="0" sz="1400" u="none" cap="none" strike="noStrike">
+      <a:defRPr b="0" i="0" spc="0" sz="1400" u="none" cap="none" strike="noStrike">
         <a:solidFill>
           <a:srgbClr val="000000"/>
         </a:solidFill>
@@ -597,7 +597,7 @@
         <a:srgbClr val="000000"/>
       </a:buClr>
       <a:buFont typeface="Arial"/>
-      <a:defRPr b="0" i="0" sz="1400" u="none" cap="none" strike="noStrike">
+      <a:defRPr b="0" i="0" spc="0" sz="1400" u="none" cap="none" strike="noStrike">
         <a:solidFill>
           <a:srgbClr val="000000"/>
         </a:solidFill>
@@ -621,7 +621,7 @@
         <a:srgbClr val="000000"/>
       </a:buClr>
       <a:buFont typeface="Arial"/>
-      <a:defRPr b="0" i="0" sz="1400" u="none" cap="none" strike="noStrike">
+      <a:defRPr b="0" i="0" spc="0" sz="1400" u="none" cap="none" strike="noStrike">
         <a:solidFill>
           <a:srgbClr val="000000"/>
         </a:solidFill>
@@ -645,7 +645,7 @@
         <a:srgbClr val="000000"/>
       </a:buClr>
       <a:buFont typeface="Arial"/>
-      <a:defRPr b="0" i="0" sz="1400" u="none" cap="none" strike="noStrike">
+      <a:defRPr b="0" i="0" spc="0" sz="1400" u="none" cap="none" strike="noStrike">
         <a:solidFill>
           <a:srgbClr val="000000"/>
         </a:solidFill>
@@ -669,7 +669,7 @@
         <a:srgbClr val="000000"/>
       </a:buClr>
       <a:buFont typeface="Arial"/>
-      <a:defRPr b="0" i="0" sz="1400" u="none" cap="none" strike="noStrike">
+      <a:defRPr b="0" i="0" spc="0" sz="1400" u="none" cap="none" strike="noStrike">
         <a:solidFill>
           <a:srgbClr val="000000"/>
         </a:solidFill>
@@ -693,7 +693,7 @@
         <a:srgbClr val="000000"/>
       </a:buClr>
       <a:buFont typeface="Arial"/>
-      <a:defRPr b="0" i="0" sz="1400" u="none" cap="none" strike="noStrike">
+      <a:defRPr b="0" i="0" spc="0" sz="1400" u="none" cap="none" strike="noStrike">
         <a:solidFill>
           <a:srgbClr val="000000"/>
         </a:solidFill>
@@ -717,7 +717,7 @@
         <a:srgbClr val="000000"/>
       </a:buClr>
       <a:buFont typeface="Arial"/>
-      <a:defRPr b="0" i="0" sz="1400" u="none" cap="none" strike="noStrike">
+      <a:defRPr b="0" i="0" spc="0" sz="1400" u="none" cap="none" strike="noStrike">
         <a:solidFill>
           <a:srgbClr val="000000"/>
         </a:solidFill>
@@ -10746,7 +10746,7 @@
           <a:srgbClr val="000000"/>
         </a:buClr>
         <a:buFont typeface="Arial"/>
-        <a:defRPr b="0" i="0" sz="1400" u="none" cap="none" strike="noStrike">
+        <a:defRPr b="0" i="0" spc="0" sz="1400" u="none" cap="none" strike="noStrike">
           <a:solidFill>
             <a:srgbClr val="000000"/>
           </a:solidFill>
@@ -10770,7 +10770,7 @@
           <a:srgbClr val="000000"/>
         </a:buClr>
         <a:buFont typeface="Arial"/>
-        <a:defRPr b="0" i="0" sz="1400" u="none" cap="none" strike="noStrike">
+        <a:defRPr b="0" i="0" spc="0" sz="1400" u="none" cap="none" strike="noStrike">
           <a:solidFill>
             <a:srgbClr val="000000"/>
           </a:solidFill>
@@ -10794,7 +10794,7 @@
           <a:srgbClr val="000000"/>
         </a:buClr>
         <a:buFont typeface="Arial"/>
-        <a:defRPr b="0" i="0" sz="1400" u="none" cap="none" strike="noStrike">
+        <a:defRPr b="0" i="0" spc="0" sz="1400" u="none" cap="none" strike="noStrike">
           <a:solidFill>
             <a:srgbClr val="000000"/>
           </a:solidFill>
@@ -10818,7 +10818,7 @@
           <a:srgbClr val="000000"/>
         </a:buClr>
         <a:buFont typeface="Arial"/>
-        <a:defRPr b="0" i="0" sz="1400" u="none" cap="none" strike="noStrike">
+        <a:defRPr b="0" i="0" spc="0" sz="1400" u="none" cap="none" strike="noStrike">
           <a:solidFill>
             <a:srgbClr val="000000"/>
           </a:solidFill>
@@ -10842,7 +10842,7 @@
           <a:srgbClr val="000000"/>
         </a:buClr>
         <a:buFont typeface="Arial"/>
-        <a:defRPr b="0" i="0" sz="1400" u="none" cap="none" strike="noStrike">
+        <a:defRPr b="0" i="0" spc="0" sz="1400" u="none" cap="none" strike="noStrike">
           <a:solidFill>
             <a:srgbClr val="000000"/>
           </a:solidFill>
@@ -10866,7 +10866,7 @@
           <a:srgbClr val="000000"/>
         </a:buClr>
         <a:buFont typeface="Arial"/>
-        <a:defRPr b="0" i="0" sz="1400" u="none" cap="none" strike="noStrike">
+        <a:defRPr b="0" i="0" spc="0" sz="1400" u="none" cap="none" strike="noStrike">
           <a:solidFill>
             <a:srgbClr val="000000"/>
           </a:solidFill>
@@ -10890,7 +10890,7 @@
           <a:srgbClr val="000000"/>
         </a:buClr>
         <a:buFont typeface="Arial"/>
-        <a:defRPr b="0" i="0" sz="1400" u="none" cap="none" strike="noStrike">
+        <a:defRPr b="0" i="0" spc="0" sz="1400" u="none" cap="none" strike="noStrike">
           <a:solidFill>
             <a:srgbClr val="000000"/>
           </a:solidFill>
@@ -10914,7 +10914,7 @@
           <a:srgbClr val="000000"/>
         </a:buClr>
         <a:buFont typeface="Arial"/>
-        <a:defRPr b="0" i="0" sz="1400" u="none" cap="none" strike="noStrike">
+        <a:defRPr b="0" i="0" spc="0" sz="1400" u="none" cap="none" strike="noStrike">
           <a:solidFill>
             <a:srgbClr val="000000"/>
           </a:solidFill>
@@ -10938,7 +10938,7 @@
           <a:srgbClr val="000000"/>
         </a:buClr>
         <a:buFont typeface="Arial"/>
-        <a:defRPr b="0" i="0" sz="1400" u="none" cap="none" strike="noStrike">
+        <a:defRPr b="0" i="0" spc="0" sz="1400" u="none" cap="none" strike="noStrike">
           <a:solidFill>
             <a:srgbClr val="000000"/>
           </a:solidFill>
@@ -10975,7 +10975,7 @@
           <a:srgbClr val="000000"/>
         </a:buClr>
         <a:buFont typeface="Arial"/>
-        <a:defRPr b="0" i="0" sz="1400" u="none" cap="none" strike="noStrike">
+        <a:defRPr b="0" i="0" spc="0" sz="1400" u="none" cap="none" strike="noStrike">
           <a:solidFill>
             <a:srgbClr val="000000"/>
           </a:solidFill>
@@ -10999,7 +10999,7 @@
           <a:srgbClr val="000000"/>
         </a:buClr>
         <a:buFont typeface="Arial"/>
-        <a:defRPr b="0" i="0" sz="1400" u="none" cap="none" strike="noStrike">
+        <a:defRPr b="0" i="0" spc="0" sz="1400" u="none" cap="none" strike="noStrike">
           <a:solidFill>
             <a:srgbClr val="000000"/>
           </a:solidFill>
@@ -11023,7 +11023,7 @@
           <a:srgbClr val="000000"/>
         </a:buClr>
         <a:buFont typeface="Arial"/>
-        <a:defRPr b="0" i="0" sz="1400" u="none" cap="none" strike="noStrike">
+        <a:defRPr b="0" i="0" spc="0" sz="1400" u="none" cap="none" strike="noStrike">
           <a:solidFill>
             <a:srgbClr val="000000"/>
           </a:solidFill>
@@ -11047,7 +11047,7 @@
           <a:srgbClr val="000000"/>
         </a:buClr>
         <a:buFont typeface="Arial"/>
-        <a:defRPr b="0" i="0" sz="1400" u="none" cap="none" strike="noStrike">
+        <a:defRPr b="0" i="0" spc="0" sz="1400" u="none" cap="none" strike="noStrike">
           <a:solidFill>
             <a:srgbClr val="000000"/>
           </a:solidFill>
@@ -11071,7 +11071,7 @@
           <a:srgbClr val="000000"/>
         </a:buClr>
         <a:buFont typeface="Arial"/>
-        <a:defRPr b="0" i="0" sz="1400" u="none" cap="none" strike="noStrike">
+        <a:defRPr b="0" i="0" spc="0" sz="1400" u="none" cap="none" strike="noStrike">
           <a:solidFill>
             <a:srgbClr val="000000"/>
           </a:solidFill>
@@ -11095,7 +11095,7 @@
           <a:srgbClr val="000000"/>
         </a:buClr>
         <a:buFont typeface="Arial"/>
-        <a:defRPr b="0" i="0" sz="1400" u="none" cap="none" strike="noStrike">
+        <a:defRPr b="0" i="0" spc="0" sz="1400" u="none" cap="none" strike="noStrike">
           <a:solidFill>
             <a:srgbClr val="000000"/>
           </a:solidFill>
@@ -11119,7 +11119,7 @@
           <a:srgbClr val="000000"/>
         </a:buClr>
         <a:buFont typeface="Arial"/>
-        <a:defRPr b="0" i="0" sz="1400" u="none" cap="none" strike="noStrike">
+        <a:defRPr b="0" i="0" spc="0" sz="1400" u="none" cap="none" strike="noStrike">
           <a:solidFill>
             <a:srgbClr val="000000"/>
           </a:solidFill>
@@ -11143,7 +11143,7 @@
           <a:srgbClr val="000000"/>
         </a:buClr>
         <a:buFont typeface="Arial"/>
-        <a:defRPr b="0" i="0" sz="1400" u="none" cap="none" strike="noStrike">
+        <a:defRPr b="0" i="0" spc="0" sz="1400" u="none" cap="none" strike="noStrike">
           <a:solidFill>
             <a:srgbClr val="000000"/>
           </a:solidFill>
@@ -11167,7 +11167,7 @@
           <a:srgbClr val="000000"/>
         </a:buClr>
         <a:buFont typeface="Arial"/>
-        <a:defRPr b="0" i="0" sz="1400" u="none" cap="none" strike="noStrike">
+        <a:defRPr b="0" i="0" spc="0" sz="1400" u="none" cap="none" strike="noStrike">
           <a:solidFill>
             <a:srgbClr val="000000"/>
           </a:solidFill>
@@ -11204,7 +11204,7 @@
           <a:srgbClr val="000000"/>
         </a:buClr>
         <a:buFont typeface="Arial"/>
-        <a:defRPr b="0" i="0" sz="1400" u="none" cap="none" strike="noStrike">
+        <a:defRPr b="0" i="0" spc="0" sz="1400" u="none" cap="none" strike="noStrike">
           <a:solidFill>
             <a:srgbClr val="000000"/>
           </a:solidFill>
@@ -11228,7 +11228,7 @@
           <a:srgbClr val="000000"/>
         </a:buClr>
         <a:buFont typeface="Arial"/>
-        <a:defRPr b="0" i="0" sz="1400" u="none" cap="none" strike="noStrike">
+        <a:defRPr b="0" i="0" spc="0" sz="1400" u="none" cap="none" strike="noStrike">
           <a:solidFill>
             <a:srgbClr val="000000"/>
           </a:solidFill>
@@ -11252,7 +11252,7 @@
           <a:srgbClr val="000000"/>
         </a:buClr>
         <a:buFont typeface="Arial"/>
-        <a:defRPr b="0" i="0" sz="1400" u="none" cap="none" strike="noStrike">
+        <a:defRPr b="0" i="0" spc="0" sz="1400" u="none" cap="none" strike="noStrike">
           <a:solidFill>
             <a:srgbClr val="000000"/>
           </a:solidFill>
@@ -11276,7 +11276,7 @@
           <a:srgbClr val="000000"/>
         </a:buClr>
         <a:buFont typeface="Arial"/>
-        <a:defRPr b="0" i="0" sz="1400" u="none" cap="none" strike="noStrike">
+        <a:defRPr b="0" i="0" spc="0" sz="1400" u="none" cap="none" strike="noStrike">
           <a:solidFill>
             <a:srgbClr val="000000"/>
           </a:solidFill>
@@ -11300,7 +11300,7 @@
           <a:srgbClr val="000000"/>
         </a:buClr>
         <a:buFont typeface="Arial"/>
-        <a:defRPr b="0" i="0" sz="1400" u="none" cap="none" strike="noStrike">
+        <a:defRPr b="0" i="0" spc="0" sz="1400" u="none" cap="none" strike="noStrike">
           <a:solidFill>
             <a:srgbClr val="000000"/>
           </a:solidFill>
@@ -11324,7 +11324,7 @@
           <a:srgbClr val="000000"/>
         </a:buClr>
         <a:buFont typeface="Arial"/>
-        <a:defRPr b="0" i="0" sz="1400" u="none" cap="none" strike="noStrike">
+        <a:defRPr b="0" i="0" spc="0" sz="1400" u="none" cap="none" strike="noStrike">
           <a:solidFill>
             <a:srgbClr val="000000"/>
           </a:solidFill>
@@ -11348,7 +11348,7 @@
           <a:srgbClr val="000000"/>
         </a:buClr>
         <a:buFont typeface="Arial"/>
-        <a:defRPr b="0" i="0" sz="1400" u="none" cap="none" strike="noStrike">
+        <a:defRPr b="0" i="0" spc="0" sz="1400" u="none" cap="none" strike="noStrike">
           <a:solidFill>
             <a:srgbClr val="000000"/>
           </a:solidFill>
@@ -11372,7 +11372,7 @@
           <a:srgbClr val="000000"/>
         </a:buClr>
         <a:buFont typeface="Arial"/>
-        <a:defRPr b="0" i="0" sz="1400" u="none" cap="none" strike="noStrike">
+        <a:defRPr b="0" i="0" spc="0" sz="1400" u="none" cap="none" strike="noStrike">
           <a:solidFill>
             <a:srgbClr val="000000"/>
           </a:solidFill>
@@ -11396,7 +11396,7 @@
           <a:srgbClr val="000000"/>
         </a:buClr>
         <a:buFont typeface="Arial"/>
-        <a:defRPr b="0" i="0" sz="1400" u="none" cap="none" strike="noStrike">
+        <a:defRPr b="0" i="0" spc="0" sz="1400" u="none" cap="none" strike="noStrike">
           <a:solidFill>
             <a:srgbClr val="000000"/>
           </a:solidFill>
@@ -12027,7 +12027,7 @@
           <a:srgbClr val="000000"/>
         </a:buClr>
         <a:buFont typeface="Arial"/>
-        <a:defRPr b="0" i="0" sz="1400" u="none" cap="none" strike="noStrike">
+        <a:defRPr b="0" i="0" spc="0" sz="1400" u="none" cap="none" strike="noStrike">
           <a:solidFill>
             <a:srgbClr val="000000"/>
           </a:solidFill>
@@ -12051,7 +12051,7 @@
           <a:srgbClr val="000000"/>
         </a:buClr>
         <a:buFont typeface="Arial"/>
-        <a:defRPr b="0" i="0" sz="1400" u="none" cap="none" strike="noStrike">
+        <a:defRPr b="0" i="0" spc="0" sz="1400" u="none" cap="none" strike="noStrike">
           <a:solidFill>
             <a:srgbClr val="000000"/>
           </a:solidFill>
@@ -12075,7 +12075,7 @@
           <a:srgbClr val="000000"/>
         </a:buClr>
         <a:buFont typeface="Arial"/>
-        <a:defRPr b="0" i="0" sz="1400" u="none" cap="none" strike="noStrike">
+        <a:defRPr b="0" i="0" spc="0" sz="1400" u="none" cap="none" strike="noStrike">
           <a:solidFill>
             <a:srgbClr val="000000"/>
           </a:solidFill>
@@ -12099,7 +12099,7 @@
           <a:srgbClr val="000000"/>
         </a:buClr>
         <a:buFont typeface="Arial"/>
-        <a:defRPr b="0" i="0" sz="1400" u="none" cap="none" strike="noStrike">
+        <a:defRPr b="0" i="0" spc="0" sz="1400" u="none" cap="none" strike="noStrike">
           <a:solidFill>
             <a:srgbClr val="000000"/>
           </a:solidFill>
@@ -12123,7 +12123,7 @@
           <a:srgbClr val="000000"/>
         </a:buClr>
         <a:buFont typeface="Arial"/>
-        <a:defRPr b="0" i="0" sz="1400" u="none" cap="none" strike="noStrike">
+        <a:defRPr b="0" i="0" spc="0" sz="1400" u="none" cap="none" strike="noStrike">
           <a:solidFill>
             <a:srgbClr val="000000"/>
           </a:solidFill>
@@ -12147,7 +12147,7 @@
           <a:srgbClr val="000000"/>
         </a:buClr>
         <a:buFont typeface="Arial"/>
-        <a:defRPr b="0" i="0" sz="1400" u="none" cap="none" strike="noStrike">
+        <a:defRPr b="0" i="0" spc="0" sz="1400" u="none" cap="none" strike="noStrike">
           <a:solidFill>
             <a:srgbClr val="000000"/>
           </a:solidFill>
@@ -12171,7 +12171,7 @@
           <a:srgbClr val="000000"/>
         </a:buClr>
         <a:buFont typeface="Arial"/>
-        <a:defRPr b="0" i="0" sz="1400" u="none" cap="none" strike="noStrike">
+        <a:defRPr b="0" i="0" spc="0" sz="1400" u="none" cap="none" strike="noStrike">
           <a:solidFill>
             <a:srgbClr val="000000"/>
           </a:solidFill>
@@ -12195,7 +12195,7 @@
           <a:srgbClr val="000000"/>
         </a:buClr>
         <a:buFont typeface="Arial"/>
-        <a:defRPr b="0" i="0" sz="1400" u="none" cap="none" strike="noStrike">
+        <a:defRPr b="0" i="0" spc="0" sz="1400" u="none" cap="none" strike="noStrike">
           <a:solidFill>
             <a:srgbClr val="000000"/>
           </a:solidFill>
@@ -12219,7 +12219,7 @@
           <a:srgbClr val="000000"/>
         </a:buClr>
         <a:buFont typeface="Arial"/>
-        <a:defRPr b="0" i="0" sz="1400" u="none" cap="none" strike="noStrike">
+        <a:defRPr b="0" i="0" spc="0" sz="1400" u="none" cap="none" strike="noStrike">
           <a:solidFill>
             <a:srgbClr val="000000"/>
           </a:solidFill>
@@ -12256,7 +12256,7 @@
           <a:srgbClr val="000000"/>
         </a:buClr>
         <a:buFont typeface="Arial"/>
-        <a:defRPr b="0" i="0" sz="1400" u="none" cap="none" strike="noStrike">
+        <a:defRPr b="0" i="0" spc="0" sz="1400" u="none" cap="none" strike="noStrike">
           <a:solidFill>
             <a:srgbClr val="000000"/>
           </a:solidFill>
@@ -12280,7 +12280,7 @@
           <a:srgbClr val="000000"/>
         </a:buClr>
         <a:buFont typeface="Arial"/>
-        <a:defRPr b="0" i="0" sz="1400" u="none" cap="none" strike="noStrike">
+        <a:defRPr b="0" i="0" spc="0" sz="1400" u="none" cap="none" strike="noStrike">
           <a:solidFill>
             <a:srgbClr val="000000"/>
           </a:solidFill>
@@ -12304,7 +12304,7 @@
           <a:srgbClr val="000000"/>
         </a:buClr>
         <a:buFont typeface="Arial"/>
-        <a:defRPr b="0" i="0" sz="1400" u="none" cap="none" strike="noStrike">
+        <a:defRPr b="0" i="0" spc="0" sz="1400" u="none" cap="none" strike="noStrike">
           <a:solidFill>
             <a:srgbClr val="000000"/>
           </a:solidFill>
@@ -12328,7 +12328,7 @@
           <a:srgbClr val="000000"/>
         </a:buClr>
         <a:buFont typeface="Arial"/>
-        <a:defRPr b="0" i="0" sz="1400" u="none" cap="none" strike="noStrike">
+        <a:defRPr b="0" i="0" spc="0" sz="1400" u="none" cap="none" strike="noStrike">
           <a:solidFill>
             <a:srgbClr val="000000"/>
           </a:solidFill>
@@ -12352,7 +12352,7 @@
           <a:srgbClr val="000000"/>
         </a:buClr>
         <a:buFont typeface="Arial"/>
-        <a:defRPr b="0" i="0" sz="1400" u="none" cap="none" strike="noStrike">
+        <a:defRPr b="0" i="0" spc="0" sz="1400" u="none" cap="none" strike="noStrike">
           <a:solidFill>
             <a:srgbClr val="000000"/>
           </a:solidFill>
@@ -12376,7 +12376,7 @@
           <a:srgbClr val="000000"/>
         </a:buClr>
         <a:buFont typeface="Arial"/>
-        <a:defRPr b="0" i="0" sz="1400" u="none" cap="none" strike="noStrike">
+        <a:defRPr b="0" i="0" spc="0" sz="1400" u="none" cap="none" strike="noStrike">
           <a:solidFill>
             <a:srgbClr val="000000"/>
           </a:solidFill>
@@ -12400,7 +12400,7 @@
           <a:srgbClr val="000000"/>
         </a:buClr>
         <a:buFont typeface="Arial"/>
-        <a:defRPr b="0" i="0" sz="1400" u="none" cap="none" strike="noStrike">
+        <a:defRPr b="0" i="0" spc="0" sz="1400" u="none" cap="none" strike="noStrike">
           <a:solidFill>
             <a:srgbClr val="000000"/>
           </a:solidFill>
@@ -12424,7 +12424,7 @@
           <a:srgbClr val="000000"/>
         </a:buClr>
         <a:buFont typeface="Arial"/>
-        <a:defRPr b="0" i="0" sz="1400" u="none" cap="none" strike="noStrike">
+        <a:defRPr b="0" i="0" spc="0" sz="1400" u="none" cap="none" strike="noStrike">
           <a:solidFill>
             <a:srgbClr val="000000"/>
           </a:solidFill>
@@ -12448,7 +12448,7 @@
           <a:srgbClr val="000000"/>
         </a:buClr>
         <a:buFont typeface="Arial"/>
-        <a:defRPr b="0" i="0" sz="1400" u="none" cap="none" strike="noStrike">
+        <a:defRPr b="0" i="0" spc="0" sz="1400" u="none" cap="none" strike="noStrike">
           <a:solidFill>
             <a:srgbClr val="000000"/>
           </a:solidFill>
@@ -12485,7 +12485,7 @@
           <a:srgbClr val="000000"/>
         </a:buClr>
         <a:buFont typeface="Arial"/>
-        <a:defRPr b="0" i="0" sz="1400" u="none" cap="none" strike="noStrike">
+        <a:defRPr b="0" i="0" spc="0" sz="1400" u="none" cap="none" strike="noStrike">
           <a:solidFill>
             <a:srgbClr val="000000"/>
           </a:solidFill>
@@ -12509,7 +12509,7 @@
           <a:srgbClr val="000000"/>
         </a:buClr>
         <a:buFont typeface="Arial"/>
-        <a:defRPr b="0" i="0" sz="1400" u="none" cap="none" strike="noStrike">
+        <a:defRPr b="0" i="0" spc="0" sz="1400" u="none" cap="none" strike="noStrike">
           <a:solidFill>
             <a:srgbClr val="000000"/>
           </a:solidFill>
@@ -12533,7 +12533,7 @@
           <a:srgbClr val="000000"/>
         </a:buClr>
         <a:buFont typeface="Arial"/>
-        <a:defRPr b="0" i="0" sz="1400" u="none" cap="none" strike="noStrike">
+        <a:defRPr b="0" i="0" spc="0" sz="1400" u="none" cap="none" strike="noStrike">
           <a:solidFill>
             <a:srgbClr val="000000"/>
           </a:solidFill>
@@ -12557,7 +12557,7 @@
           <a:srgbClr val="000000"/>
         </a:buClr>
         <a:buFont typeface="Arial"/>
-        <a:defRPr b="0" i="0" sz="1400" u="none" cap="none" strike="noStrike">
+        <a:defRPr b="0" i="0" spc="0" sz="1400" u="none" cap="none" strike="noStrike">
           <a:solidFill>
             <a:srgbClr val="000000"/>
           </a:solidFill>
@@ -12581,7 +12581,7 @@
           <a:srgbClr val="000000"/>
         </a:buClr>
         <a:buFont typeface="Arial"/>
-        <a:defRPr b="0" i="0" sz="1400" u="none" cap="none" strike="noStrike">
+        <a:defRPr b="0" i="0" spc="0" sz="1400" u="none" cap="none" strike="noStrike">
           <a:solidFill>
             <a:srgbClr val="000000"/>
           </a:solidFill>
@@ -12605,7 +12605,7 @@
           <a:srgbClr val="000000"/>
         </a:buClr>
         <a:buFont typeface="Arial"/>
-        <a:defRPr b="0" i="0" sz="1400" u="none" cap="none" strike="noStrike">
+        <a:defRPr b="0" i="0" spc="0" sz="1400" u="none" cap="none" strike="noStrike">
           <a:solidFill>
             <a:srgbClr val="000000"/>
           </a:solidFill>
@@ -12629,7 +12629,7 @@
           <a:srgbClr val="000000"/>
         </a:buClr>
         <a:buFont typeface="Arial"/>
-        <a:defRPr b="0" i="0" sz="1400" u="none" cap="none" strike="noStrike">
+        <a:defRPr b="0" i="0" spc="0" sz="1400" u="none" cap="none" strike="noStrike">
           <a:solidFill>
             <a:srgbClr val="000000"/>
           </a:solidFill>
@@ -12653,7 +12653,7 @@
           <a:srgbClr val="000000"/>
         </a:buClr>
         <a:buFont typeface="Arial"/>
-        <a:defRPr b="0" i="0" sz="1400" u="none" cap="none" strike="noStrike">
+        <a:defRPr b="0" i="0" spc="0" sz="1400" u="none" cap="none" strike="noStrike">
           <a:solidFill>
             <a:srgbClr val="000000"/>
           </a:solidFill>
@@ -12677,7 +12677,7 @@
           <a:srgbClr val="000000"/>
         </a:buClr>
         <a:buFont typeface="Arial"/>
-        <a:defRPr b="0" i="0" sz="1400" u="none" cap="none" strike="noStrike">
+        <a:defRPr b="0" i="0" spc="0" sz="1400" u="none" cap="none" strike="noStrike">
           <a:solidFill>
             <a:srgbClr val="000000"/>
           </a:solidFill>
@@ -18032,7 +18032,7 @@
             <a:tbl>
               <a:tblPr>
                 <a:noFill/>
-                <a:tableStyleId>{7891F278-94DB-47D7-BB73-DE8431C95FB5}</a:tableStyleId>
+                <a:tableStyleId>{3B8752E6-D34E-45BA-A62B-1A5FE0965408}</a:tableStyleId>
               </a:tblPr>
               <a:tblGrid>
                 <a:gridCol w="2103125"/>
@@ -20459,7 +20459,7 @@
             <a:tbl>
               <a:tblPr>
                 <a:noFill/>
-                <a:tableStyleId>{7891F278-94DB-47D7-BB73-DE8431C95FB5}</a:tableStyleId>
+                <a:tableStyleId>{3B8752E6-D34E-45BA-A62B-1A5FE0965408}</a:tableStyleId>
               </a:tblPr>
               <a:tblGrid>
                 <a:gridCol w="638675"/>
@@ -22669,7 +22669,7 @@
             <a:tbl>
               <a:tblPr>
                 <a:noFill/>
-                <a:tableStyleId>{7891F278-94DB-47D7-BB73-DE8431C95FB5}</a:tableStyleId>
+                <a:tableStyleId>{3B8752E6-D34E-45BA-A62B-1A5FE0965408}</a:tableStyleId>
               </a:tblPr>
               <a:tblGrid>
                 <a:gridCol w="1280725"/>
@@ -27092,6 +27092,285 @@
 </file>
 
 <file path=ppt/theme/theme1.xml><?xml version="1.0" encoding="utf-8"?>
+<a:theme xmlns:a="http://schemas.openxmlformats.org/drawingml/2006/main" xmlns:r="http://schemas.openxmlformats.org/officeDocument/2006/relationships" name="AMOS Slides Template">
+  <a:themeElements>
+    <a:clrScheme name="Simple Light">
+      <a:dk1>
+        <a:srgbClr val="000000"/>
+      </a:dk1>
+      <a:lt1>
+        <a:srgbClr val="FFFFFF"/>
+      </a:lt1>
+      <a:dk2>
+        <a:srgbClr val="404040"/>
+      </a:dk2>
+      <a:lt2>
+        <a:srgbClr val="808080"/>
+      </a:lt2>
+      <a:accent1>
+        <a:srgbClr val="D0D0D0"/>
+      </a:accent1>
+      <a:accent2>
+        <a:srgbClr val="4169E1"/>
+      </a:accent2>
+      <a:accent3>
+        <a:srgbClr val="4CAF50"/>
+      </a:accent3>
+      <a:accent4>
+        <a:srgbClr val="FEB612"/>
+      </a:accent4>
+      <a:accent5>
+        <a:srgbClr val="F36838"/>
+      </a:accent5>
+      <a:accent6>
+        <a:srgbClr val="8E44AD"/>
+      </a:accent6>
+      <a:hlink>
+        <a:srgbClr val="1E90FF"/>
+      </a:hlink>
+      <a:folHlink>
+        <a:srgbClr val="0097A7"/>
+      </a:folHlink>
+    </a:clrScheme>
+    <a:fontScheme name="Office">
+      <a:majorFont>
+        <a:latin typeface="Arial"/>
+        <a:ea typeface=""/>
+        <a:cs typeface=""/>
+        <a:font script="Jpan" typeface="ＭＳ Ｐゴシック"/>
+        <a:font script="Hang" typeface="맑은 고딕"/>
+        <a:font script="Hans" typeface="宋体"/>
+        <a:font script="Hant" typeface="新細明體"/>
+        <a:font script="Arab" typeface="Times New Roman"/>
+        <a:font script="Hebr" typeface="Times New Roman"/>
+        <a:font script="Thai" typeface="Angsana New"/>
+        <a:font script="Ethi" typeface="Nyala"/>
+        <a:font script="Beng" typeface="Vrinda"/>
+        <a:font script="Gujr" typeface="Shruti"/>
+        <a:font script="Khmr" typeface="MoolBoran"/>
+        <a:font script="Knda" typeface="Tunga"/>
+        <a:font script="Guru" typeface="Raavi"/>
+        <a:font script="Cans" typeface="Euphemia"/>
+        <a:font script="Cher" typeface="Plantagenet Cherokee"/>
+        <a:font script="Yiii" typeface="Microsoft Yi Baiti"/>
+        <a:font script="Tibt" typeface="Microsoft Himalaya"/>
+        <a:font script="Thaa" typeface="MV Boli"/>
+        <a:font script="Deva" typeface="Mangal"/>
+        <a:font script="Telu" typeface="Gautami"/>
+        <a:font script="Taml" typeface="Latha"/>
+        <a:font script="Syrc" typeface="Estrangelo Edessa"/>
+        <a:font script="Orya" typeface="Kalinga"/>
+        <a:font script="Mlym" typeface="Kartika"/>
+        <a:font script="Laoo" typeface="DokChampa"/>
+        <a:font script="Sinh" typeface="Iskoola Pota"/>
+        <a:font script="Mong" typeface="Mongolian Baiti"/>
+        <a:font script="Viet" typeface="Times New Roman"/>
+        <a:font script="Uigh" typeface="Microsoft Uighur"/>
+        <a:font script="Geor" typeface="Sylfaen"/>
+      </a:majorFont>
+      <a:minorFont>
+        <a:latin typeface="Arial"/>
+        <a:ea typeface=""/>
+        <a:cs typeface=""/>
+        <a:font script="Jpan" typeface="ＭＳ Ｐゴシック"/>
+        <a:font script="Hang" typeface="맑은 고딕"/>
+        <a:font script="Hans" typeface="宋体"/>
+        <a:font script="Hant" typeface="新細明體"/>
+        <a:font script="Arab" typeface="Arial"/>
+        <a:font script="Hebr" typeface="Arial"/>
+        <a:font script="Thai" typeface="Cordia New"/>
+        <a:font script="Ethi" typeface="Nyala"/>
+        <a:font script="Beng" typeface="Vrinda"/>
+        <a:font script="Gujr" typeface="Shruti"/>
+        <a:font script="Khmr" typeface="DaunPenh"/>
+        <a:font script="Knda" typeface="Tunga"/>
+        <a:font script="Guru" typeface="Raavi"/>
+        <a:font script="Cans" typeface="Euphemia"/>
+        <a:font script="Cher" typeface="Plantagenet Cherokee"/>
+        <a:font script="Yiii" typeface="Microsoft Yi Baiti"/>
+        <a:font script="Tibt" typeface="Microsoft Himalaya"/>
+        <a:font script="Thaa" typeface="MV Boli"/>
+        <a:font script="Deva" typeface="Mangal"/>
+        <a:font script="Telu" typeface="Gautami"/>
+        <a:font script="Taml" typeface="Latha"/>
+        <a:font script="Syrc" typeface="Estrangelo Edessa"/>
+        <a:font script="Orya" typeface="Kalinga"/>
+        <a:font script="Mlym" typeface="Kartika"/>
+        <a:font script="Laoo" typeface="DokChampa"/>
+        <a:font script="Sinh" typeface="Iskoola Pota"/>
+        <a:font script="Mong" typeface="Mongolian Baiti"/>
+        <a:font script="Viet" typeface="Arial"/>
+        <a:font script="Uigh" typeface="Microsoft Uighur"/>
+        <a:font script="Geor" typeface="Sylfaen"/>
+      </a:minorFont>
+    </a:fontScheme>
+    <a:fmtScheme name="Office">
+      <a:fillStyleLst>
+        <a:solidFill>
+          <a:schemeClr val="phClr"/>
+        </a:solidFill>
+        <a:gradFill rotWithShape="1">
+          <a:gsLst>
+            <a:gs pos="0">
+              <a:schemeClr val="phClr">
+                <a:tint val="50000"/>
+                <a:satMod val="300000"/>
+              </a:schemeClr>
+            </a:gs>
+            <a:gs pos="35000">
+              <a:schemeClr val="phClr">
+                <a:tint val="37000"/>
+                <a:satMod val="300000"/>
+              </a:schemeClr>
+            </a:gs>
+            <a:gs pos="100000">
+              <a:schemeClr val="phClr">
+                <a:tint val="15000"/>
+                <a:satMod val="350000"/>
+              </a:schemeClr>
+            </a:gs>
+          </a:gsLst>
+          <a:lin ang="16200000" scaled="1"/>
+        </a:gradFill>
+        <a:gradFill rotWithShape="1">
+          <a:gsLst>
+            <a:gs pos="0">
+              <a:schemeClr val="phClr">
+                <a:tint val="100000"/>
+                <a:shade val="100000"/>
+                <a:satMod val="130000"/>
+              </a:schemeClr>
+            </a:gs>
+            <a:gs pos="100000">
+              <a:schemeClr val="phClr">
+                <a:tint val="50000"/>
+                <a:shade val="100000"/>
+                <a:satMod val="350000"/>
+              </a:schemeClr>
+            </a:gs>
+          </a:gsLst>
+          <a:lin ang="16200000" scaled="0"/>
+        </a:gradFill>
+      </a:fillStyleLst>
+      <a:lnStyleLst>
+        <a:ln w="9525" cap="flat" cmpd="sng" algn="ctr">
+          <a:solidFill>
+            <a:schemeClr val="phClr">
+              <a:shade val="95000"/>
+              <a:satMod val="105000"/>
+            </a:schemeClr>
+          </a:solidFill>
+          <a:prstDash val="solid"/>
+        </a:ln>
+        <a:ln w="25400" cap="flat" cmpd="sng" algn="ctr">
+          <a:solidFill>
+            <a:schemeClr val="phClr"/>
+          </a:solidFill>
+          <a:prstDash val="solid"/>
+        </a:ln>
+        <a:ln w="38100" cap="flat" cmpd="sng" algn="ctr">
+          <a:solidFill>
+            <a:schemeClr val="phClr"/>
+          </a:solidFill>
+          <a:prstDash val="solid"/>
+        </a:ln>
+      </a:lnStyleLst>
+      <a:effectStyleLst>
+        <a:effectStyle>
+          <a:effectLst>
+            <a:outerShdw blurRad="40000" dist="20000" dir="5400000" rotWithShape="0">
+              <a:srgbClr val="000000">
+                <a:alpha val="38000"/>
+              </a:srgbClr>
+            </a:outerShdw>
+          </a:effectLst>
+        </a:effectStyle>
+        <a:effectStyle>
+          <a:effectLst>
+            <a:outerShdw blurRad="40000" dist="23000" dir="5400000" rotWithShape="0">
+              <a:srgbClr val="000000">
+                <a:alpha val="35000"/>
+              </a:srgbClr>
+            </a:outerShdw>
+          </a:effectLst>
+        </a:effectStyle>
+        <a:effectStyle>
+          <a:effectLst>
+            <a:outerShdw blurRad="40000" dist="23000" dir="5400000" rotWithShape="0">
+              <a:srgbClr val="000000">
+                <a:alpha val="35000"/>
+              </a:srgbClr>
+            </a:outerShdw>
+          </a:effectLst>
+          <a:scene3d>
+            <a:camera prst="orthographicFront">
+              <a:rot lat="0" lon="0" rev="0"/>
+            </a:camera>
+            <a:lightRig rig="threePt" dir="t">
+              <a:rot lat="0" lon="0" rev="1200000"/>
+            </a:lightRig>
+          </a:scene3d>
+          <a:sp3d>
+            <a:bevelT w="63500" h="25400"/>
+          </a:sp3d>
+        </a:effectStyle>
+      </a:effectStyleLst>
+      <a:bgFillStyleLst>
+        <a:solidFill>
+          <a:schemeClr val="phClr"/>
+        </a:solidFill>
+        <a:gradFill rotWithShape="1">
+          <a:gsLst>
+            <a:gs pos="0">
+              <a:schemeClr val="phClr">
+                <a:tint val="40000"/>
+                <a:satMod val="350000"/>
+              </a:schemeClr>
+            </a:gs>
+            <a:gs pos="40000">
+              <a:schemeClr val="phClr">
+                <a:tint val="45000"/>
+                <a:shade val="99000"/>
+                <a:satMod val="350000"/>
+              </a:schemeClr>
+            </a:gs>
+            <a:gs pos="100000">
+              <a:schemeClr val="phClr">
+                <a:shade val="20000"/>
+                <a:satMod val="255000"/>
+              </a:schemeClr>
+            </a:gs>
+          </a:gsLst>
+          <a:path path="circle">
+            <a:fillToRect l="50000" t="-80000" r="50000" b="180000"/>
+          </a:path>
+        </a:gradFill>
+        <a:gradFill rotWithShape="1">
+          <a:gsLst>
+            <a:gs pos="0">
+              <a:schemeClr val="phClr">
+                <a:tint val="80000"/>
+                <a:satMod val="300000"/>
+              </a:schemeClr>
+            </a:gs>
+            <a:gs pos="100000">
+              <a:schemeClr val="phClr">
+                <a:shade val="30000"/>
+                <a:satMod val="200000"/>
+              </a:schemeClr>
+            </a:gs>
+          </a:gsLst>
+          <a:path path="circle">
+            <a:fillToRect l="50000" t="50000" r="50000" b="50000"/>
+          </a:path>
+        </a:gradFill>
+      </a:bgFillStyleLst>
+    </a:fmtScheme>
+  </a:themeElements>
+</a:theme>
+</file>
+
+<file path=ppt/theme/theme2.xml><?xml version="1.0" encoding="utf-8"?>
 <a:theme xmlns:a="http://schemas.openxmlformats.org/drawingml/2006/main" xmlns:r="http://schemas.openxmlformats.org/officeDocument/2006/relationships">
   <a:themeElements>
     <a:clrScheme name="Default">
@@ -27370,7 +27649,7 @@
 </a:theme>
 </file>
 
-<file path=ppt/theme/theme2.xml><?xml version="1.0" encoding="utf-8"?>
+<file path=ppt/theme/theme3.xml><?xml version="1.0" encoding="utf-8"?>
 <a:theme xmlns:a="http://schemas.openxmlformats.org/drawingml/2006/main" xmlns:r="http://schemas.openxmlformats.org/officeDocument/2006/relationships" name="POSS Slides Template">
   <a:themeElements>
     <a:clrScheme name="Simple Light">
@@ -27647,283 +27926,4 @@
     </a:fmtScheme>
   </a:themeElements>
 </a:theme>
-</file>
-
-<file path=ppt/theme/theme3.xml><?xml version="1.0" encoding="utf-8"?>
-<a:theme xmlns:a="http://schemas.openxmlformats.org/drawingml/2006/main" xmlns:r="http://schemas.openxmlformats.org/officeDocument/2006/relationships" name="AMOS Slides Template">
-  <a:themeElements>
-    <a:clrScheme name="Simple Light">
-      <a:dk1>
-        <a:srgbClr val="000000"/>
-      </a:dk1>
-      <a:lt1>
-        <a:srgbClr val="FFFFFF"/>
-      </a:lt1>
-      <a:dk2>
-        <a:srgbClr val="404040"/>
-      </a:dk2>
-      <a:lt2>
-        <a:srgbClr val="808080"/>
-      </a:lt2>
-      <a:accent1>
-        <a:srgbClr val="D0D0D0"/>
-      </a:accent1>
-      <a:accent2>
-        <a:srgbClr val="4169E1"/>
-      </a:accent2>
-      <a:accent3>
-        <a:srgbClr val="4CAF50"/>
-      </a:accent3>
-      <a:accent4>
-        <a:srgbClr val="FEB612"/>
-      </a:accent4>
-      <a:accent5>
-        <a:srgbClr val="F36838"/>
-      </a:accent5>
-      <a:accent6>
-        <a:srgbClr val="8E44AD"/>
-      </a:accent6>
-      <a:hlink>
-        <a:srgbClr val="1E90FF"/>
-      </a:hlink>
-      <a:folHlink>
-        <a:srgbClr val="0097A7"/>
-      </a:folHlink>
-    </a:clrScheme>
-    <a:fontScheme name="Office">
-      <a:majorFont>
-        <a:latin typeface="Arial"/>
-        <a:ea typeface=""/>
-        <a:cs typeface=""/>
-        <a:font script="Jpan" typeface="ＭＳ Ｐゴシック"/>
-        <a:font script="Hang" typeface="맑은 고딕"/>
-        <a:font script="Hans" typeface="宋体"/>
-        <a:font script="Hant" typeface="新細明體"/>
-        <a:font script="Arab" typeface="Times New Roman"/>
-        <a:font script="Hebr" typeface="Times New Roman"/>
-        <a:font script="Thai" typeface="Angsana New"/>
-        <a:font script="Ethi" typeface="Nyala"/>
-        <a:font script="Beng" typeface="Vrinda"/>
-        <a:font script="Gujr" typeface="Shruti"/>
-        <a:font script="Khmr" typeface="MoolBoran"/>
-        <a:font script="Knda" typeface="Tunga"/>
-        <a:font script="Guru" typeface="Raavi"/>
-        <a:font script="Cans" typeface="Euphemia"/>
-        <a:font script="Cher" typeface="Plantagenet Cherokee"/>
-        <a:font script="Yiii" typeface="Microsoft Yi Baiti"/>
-        <a:font script="Tibt" typeface="Microsoft Himalaya"/>
-        <a:font script="Thaa" typeface="MV Boli"/>
-        <a:font script="Deva" typeface="Mangal"/>
-        <a:font script="Telu" typeface="Gautami"/>
-        <a:font script="Taml" typeface="Latha"/>
-        <a:font script="Syrc" typeface="Estrangelo Edessa"/>
-        <a:font script="Orya" typeface="Kalinga"/>
-        <a:font script="Mlym" typeface="Kartika"/>
-        <a:font script="Laoo" typeface="DokChampa"/>
-        <a:font script="Sinh" typeface="Iskoola Pota"/>
-        <a:font script="Mong" typeface="Mongolian Baiti"/>
-        <a:font script="Viet" typeface="Times New Roman"/>
-        <a:font script="Uigh" typeface="Microsoft Uighur"/>
-        <a:font script="Geor" typeface="Sylfaen"/>
-      </a:majorFont>
-      <a:minorFont>
-        <a:latin typeface="Arial"/>
-        <a:ea typeface=""/>
-        <a:cs typeface=""/>
-        <a:font script="Jpan" typeface="ＭＳ Ｐゴシック"/>
-        <a:font script="Hang" typeface="맑은 고딕"/>
-        <a:font script="Hans" typeface="宋体"/>
-        <a:font script="Hant" typeface="新細明體"/>
-        <a:font script="Arab" typeface="Arial"/>
-        <a:font script="Hebr" typeface="Arial"/>
-        <a:font script="Thai" typeface="Cordia New"/>
-        <a:font script="Ethi" typeface="Nyala"/>
-        <a:font script="Beng" typeface="Vrinda"/>
-        <a:font script="Gujr" typeface="Shruti"/>
-        <a:font script="Khmr" typeface="DaunPenh"/>
-        <a:font script="Knda" typeface="Tunga"/>
-        <a:font script="Guru" typeface="Raavi"/>
-        <a:font script="Cans" typeface="Euphemia"/>
-        <a:font script="Cher" typeface="Plantagenet Cherokee"/>
-        <a:font script="Yiii" typeface="Microsoft Yi Baiti"/>
-        <a:font script="Tibt" typeface="Microsoft Himalaya"/>
-        <a:font script="Thaa" typeface="MV Boli"/>
-        <a:font script="Deva" typeface="Mangal"/>
-        <a:font script="Telu" typeface="Gautami"/>
-        <a:font script="Taml" typeface="Latha"/>
-        <a:font script="Syrc" typeface="Estrangelo Edessa"/>
-        <a:font script="Orya" typeface="Kalinga"/>
-        <a:font script="Mlym" typeface="Kartika"/>
-        <a:font script="Laoo" typeface="DokChampa"/>
-        <a:font script="Sinh" typeface="Iskoola Pota"/>
-        <a:font script="Mong" typeface="Mongolian Baiti"/>
-        <a:font script="Viet" typeface="Arial"/>
-        <a:font script="Uigh" typeface="Microsoft Uighur"/>
-        <a:font script="Geor" typeface="Sylfaen"/>
-      </a:minorFont>
-    </a:fontScheme>
-    <a:fmtScheme name="Office">
-      <a:fillStyleLst>
-        <a:solidFill>
-          <a:schemeClr val="phClr"/>
-        </a:solidFill>
-        <a:gradFill rotWithShape="1">
-          <a:gsLst>
-            <a:gs pos="0">
-              <a:schemeClr val="phClr">
-                <a:tint val="50000"/>
-                <a:satMod val="300000"/>
-              </a:schemeClr>
-            </a:gs>
-            <a:gs pos="35000">
-              <a:schemeClr val="phClr">
-                <a:tint val="37000"/>
-                <a:satMod val="300000"/>
-              </a:schemeClr>
-            </a:gs>
-            <a:gs pos="100000">
-              <a:schemeClr val="phClr">
-                <a:tint val="15000"/>
-                <a:satMod val="350000"/>
-              </a:schemeClr>
-            </a:gs>
-          </a:gsLst>
-          <a:lin ang="16200000" scaled="1"/>
-        </a:gradFill>
-        <a:gradFill rotWithShape="1">
-          <a:gsLst>
-            <a:gs pos="0">
-              <a:schemeClr val="phClr">
-                <a:tint val="100000"/>
-                <a:shade val="100000"/>
-                <a:satMod val="130000"/>
-              </a:schemeClr>
-            </a:gs>
-            <a:gs pos="100000">
-              <a:schemeClr val="phClr">
-                <a:tint val="50000"/>
-                <a:shade val="100000"/>
-                <a:satMod val="350000"/>
-              </a:schemeClr>
-            </a:gs>
-          </a:gsLst>
-          <a:lin ang="16200000" scaled="0"/>
-        </a:gradFill>
-      </a:fillStyleLst>
-      <a:lnStyleLst>
-        <a:ln w="9525" cap="flat" cmpd="sng" algn="ctr">
-          <a:solidFill>
-            <a:schemeClr val="phClr">
-              <a:shade val="95000"/>
-              <a:satMod val="105000"/>
-            </a:schemeClr>
-          </a:solidFill>
-          <a:prstDash val="solid"/>
-        </a:ln>
-        <a:ln w="25400" cap="flat" cmpd="sng" algn="ctr">
-          <a:solidFill>
-            <a:schemeClr val="phClr"/>
-          </a:solidFill>
-          <a:prstDash val="solid"/>
-        </a:ln>
-        <a:ln w="38100" cap="flat" cmpd="sng" algn="ctr">
-          <a:solidFill>
-            <a:schemeClr val="phClr"/>
-          </a:solidFill>
-          <a:prstDash val="solid"/>
-        </a:ln>
-      </a:lnStyleLst>
-      <a:effectStyleLst>
-        <a:effectStyle>
-          <a:effectLst>
-            <a:outerShdw blurRad="40000" dist="20000" dir="5400000" rotWithShape="0">
-              <a:srgbClr val="000000">
-                <a:alpha val="38000"/>
-              </a:srgbClr>
-            </a:outerShdw>
-          </a:effectLst>
-        </a:effectStyle>
-        <a:effectStyle>
-          <a:effectLst>
-            <a:outerShdw blurRad="40000" dist="23000" dir="5400000" rotWithShape="0">
-              <a:srgbClr val="000000">
-                <a:alpha val="35000"/>
-              </a:srgbClr>
-            </a:outerShdw>
-          </a:effectLst>
-        </a:effectStyle>
-        <a:effectStyle>
-          <a:effectLst>
-            <a:outerShdw blurRad="40000" dist="23000" dir="5400000" rotWithShape="0">
-              <a:srgbClr val="000000">
-                <a:alpha val="35000"/>
-              </a:srgbClr>
-            </a:outerShdw>
-          </a:effectLst>
-          <a:scene3d>
-            <a:camera prst="orthographicFront">
-              <a:rot lat="0" lon="0" rev="0"/>
-            </a:camera>
-            <a:lightRig rig="threePt" dir="t">
-              <a:rot lat="0" lon="0" rev="1200000"/>
-            </a:lightRig>
-          </a:scene3d>
-          <a:sp3d>
-            <a:bevelT w="63500" h="25400"/>
-          </a:sp3d>
-        </a:effectStyle>
-      </a:effectStyleLst>
-      <a:bgFillStyleLst>
-        <a:solidFill>
-          <a:schemeClr val="phClr"/>
-        </a:solidFill>
-        <a:gradFill rotWithShape="1">
-          <a:gsLst>
-            <a:gs pos="0">
-              <a:schemeClr val="phClr">
-                <a:tint val="40000"/>
-                <a:satMod val="350000"/>
-              </a:schemeClr>
-            </a:gs>
-            <a:gs pos="40000">
-              <a:schemeClr val="phClr">
-                <a:tint val="45000"/>
-                <a:shade val="99000"/>
-                <a:satMod val="350000"/>
-              </a:schemeClr>
-            </a:gs>
-            <a:gs pos="100000">
-              <a:schemeClr val="phClr">
-                <a:shade val="20000"/>
-                <a:satMod val="255000"/>
-              </a:schemeClr>
-            </a:gs>
-          </a:gsLst>
-          <a:path path="circle">
-            <a:fillToRect l="50000" t="-80000" r="50000" b="180000"/>
-          </a:path>
-        </a:gradFill>
-        <a:gradFill rotWithShape="1">
-          <a:gsLst>
-            <a:gs pos="0">
-              <a:schemeClr val="phClr">
-                <a:tint val="80000"/>
-                <a:satMod val="300000"/>
-              </a:schemeClr>
-            </a:gs>
-            <a:gs pos="100000">
-              <a:schemeClr val="phClr">
-                <a:shade val="30000"/>
-                <a:satMod val="200000"/>
-              </a:schemeClr>
-            </a:gs>
-          </a:gsLst>
-          <a:path path="circle">
-            <a:fillToRect l="50000" t="50000" r="50000" b="50000"/>
-          </a:path>
-        </a:gradFill>
-      </a:bgFillStyleLst>
-    </a:fmtScheme>
-  </a:themeElements>
-</a:theme>
 </file>